--- a/data/deep_dives/carteira_pravaler_f2aaacac/exports/documentary_comparison.pptx
+++ b/data/deep_dives/carteira_pravaler_f2aaacac/exports/documentary_comparison.pptx
@@ -5497,7 +5497,7 @@
                       <a:r>
                         <a:rPr sz="1300" b="1">
                           <a:solidFill>
-                            <a:srgbClr val="1F1F1F"/>
+                            <a:srgbClr val="FFFFFF"/>
                           </a:solidFill>
                           <a:latin typeface="Calibri"/>
                         </a:rPr>
@@ -5507,7 +5507,7 @@
                   </a:txBody>
                   <a:tcPr marL="91440" marR="91440" marT="41148" marB="41148" anchor="ctr">
                     <a:solidFill>
-                      <a:srgbClr val="EC7000"/>
+                      <a:srgbClr val="FF6200"/>
                     </a:solidFill>
                     <a:lnL>
                       <a:noFill/>
@@ -5546,7 +5546,7 @@
                       <a:r>
                         <a:rPr sz="1300" b="1">
                           <a:solidFill>
-                            <a:srgbClr val="1F1F1F"/>
+                            <a:srgbClr val="FFFFFF"/>
                           </a:solidFill>
                           <a:latin typeface="Calibri"/>
                         </a:rPr>
@@ -5556,7 +5556,7 @@
                   </a:txBody>
                   <a:tcPr marL="91440" marR="91440" marT="41148" marB="41148" anchor="ctr">
                     <a:solidFill>
-                      <a:srgbClr val="EC7000"/>
+                      <a:srgbClr val="FF6200"/>
                     </a:solidFill>
                     <a:lnL>
                       <a:noFill/>
@@ -5595,7 +5595,7 @@
                       <a:r>
                         <a:rPr sz="1300" b="1">
                           <a:solidFill>
-                            <a:srgbClr val="1F1F1F"/>
+                            <a:srgbClr val="FFFFFF"/>
                           </a:solidFill>
                           <a:latin typeface="Calibri"/>
                         </a:rPr>
@@ -5605,7 +5605,7 @@
                   </a:txBody>
                   <a:tcPr marL="91440" marR="91440" marT="41148" marB="41148" anchor="ctr">
                     <a:solidFill>
-                      <a:srgbClr val="EC7000"/>
+                      <a:srgbClr val="FF6200"/>
                     </a:solidFill>
                     <a:lnL>
                       <a:noFill/>
@@ -5644,7 +5644,7 @@
                       <a:r>
                         <a:rPr sz="1300" b="1">
                           <a:solidFill>
-                            <a:srgbClr val="1F1F1F"/>
+                            <a:srgbClr val="FFFFFF"/>
                           </a:solidFill>
                           <a:latin typeface="Calibri"/>
                         </a:rPr>
@@ -5654,7 +5654,7 @@
                   </a:txBody>
                   <a:tcPr marL="91440" marR="91440" marT="41148" marB="41148" anchor="ctr">
                     <a:solidFill>
-                      <a:srgbClr val="EC7000"/>
+                      <a:srgbClr val="FF6200"/>
                     </a:solidFill>
                     <a:lnL>
                       <a:noFill/>
@@ -5693,7 +5693,7 @@
                       <a:r>
                         <a:rPr sz="1300" b="1">
                           <a:solidFill>
-                            <a:srgbClr val="1F1F1F"/>
+                            <a:srgbClr val="FFFFFF"/>
                           </a:solidFill>
                           <a:latin typeface="Calibri"/>
                         </a:rPr>
@@ -5703,7 +5703,7 @@
                   </a:txBody>
                   <a:tcPr marL="91440" marR="91440" marT="41148" marB="41148" anchor="ctr">
                     <a:solidFill>
-                      <a:srgbClr val="EC7000"/>
+                      <a:srgbClr val="FF6200"/>
                     </a:solidFill>
                     <a:lnL>
                       <a:noFill/>
@@ -7945,7 +7945,7 @@
                       <a:r>
                         <a:rPr sz="1300" b="1">
                           <a:solidFill>
-                            <a:srgbClr val="1F1F1F"/>
+                            <a:srgbClr val="FFFFFF"/>
                           </a:solidFill>
                           <a:latin typeface="Calibri"/>
                         </a:rPr>
@@ -7955,7 +7955,7 @@
                   </a:txBody>
                   <a:tcPr marL="91440" marR="91440" marT="41148" marB="41148" anchor="ctr">
                     <a:solidFill>
-                      <a:srgbClr val="EC7000"/>
+                      <a:srgbClr val="FF6200"/>
                     </a:solidFill>
                     <a:lnL>
                       <a:noFill/>
@@ -7994,7 +7994,7 @@
                       <a:r>
                         <a:rPr sz="1300" b="1">
                           <a:solidFill>
-                            <a:srgbClr val="1F1F1F"/>
+                            <a:srgbClr val="FFFFFF"/>
                           </a:solidFill>
                           <a:latin typeface="Calibri"/>
                         </a:rPr>
@@ -8004,7 +8004,7 @@
                   </a:txBody>
                   <a:tcPr marL="91440" marR="91440" marT="41148" marB="41148" anchor="ctr">
                     <a:solidFill>
-                      <a:srgbClr val="EC7000"/>
+                      <a:srgbClr val="FF6200"/>
                     </a:solidFill>
                     <a:lnL>
                       <a:noFill/>
@@ -8043,7 +8043,7 @@
                       <a:r>
                         <a:rPr sz="1300" b="1">
                           <a:solidFill>
-                            <a:srgbClr val="1F1F1F"/>
+                            <a:srgbClr val="FFFFFF"/>
                           </a:solidFill>
                           <a:latin typeface="Calibri"/>
                         </a:rPr>
@@ -8053,7 +8053,7 @@
                   </a:txBody>
                   <a:tcPr marL="91440" marR="91440" marT="41148" marB="41148" anchor="ctr">
                     <a:solidFill>
-                      <a:srgbClr val="EC7000"/>
+                      <a:srgbClr val="FF6200"/>
                     </a:solidFill>
                     <a:lnL>
                       <a:noFill/>
@@ -8092,7 +8092,7 @@
                       <a:r>
                         <a:rPr sz="1300" b="1">
                           <a:solidFill>
-                            <a:srgbClr val="1F1F1F"/>
+                            <a:srgbClr val="FFFFFF"/>
                           </a:solidFill>
                           <a:latin typeface="Calibri"/>
                         </a:rPr>
@@ -8102,7 +8102,7 @@
                   </a:txBody>
                   <a:tcPr marL="91440" marR="91440" marT="41148" marB="41148" anchor="ctr">
                     <a:solidFill>
-                      <a:srgbClr val="EC7000"/>
+                      <a:srgbClr val="FF6200"/>
                     </a:solidFill>
                     <a:lnL>
                       <a:noFill/>
@@ -8141,7 +8141,7 @@
                       <a:r>
                         <a:rPr sz="1300" b="1">
                           <a:solidFill>
-                            <a:srgbClr val="1F1F1F"/>
+                            <a:srgbClr val="FFFFFF"/>
                           </a:solidFill>
                           <a:latin typeface="Calibri"/>
                         </a:rPr>
@@ -8151,7 +8151,7 @@
                   </a:txBody>
                   <a:tcPr marL="91440" marR="91440" marT="41148" marB="41148" anchor="ctr">
                     <a:solidFill>
-                      <a:srgbClr val="EC7000"/>
+                      <a:srgbClr val="FF6200"/>
                     </a:solidFill>
                     <a:lnL>
                       <a:noFill/>
@@ -10828,7 +10828,7 @@
                       <a:r>
                         <a:rPr sz="1300" b="1">
                           <a:solidFill>
-                            <a:srgbClr val="1F1F1F"/>
+                            <a:srgbClr val="FFFFFF"/>
                           </a:solidFill>
                           <a:latin typeface="Calibri"/>
                         </a:rPr>
@@ -10838,7 +10838,7 @@
                   </a:txBody>
                   <a:tcPr marL="91440" marR="91440" marT="41148" marB="41148" anchor="ctr">
                     <a:solidFill>
-                      <a:srgbClr val="EC7000"/>
+                      <a:srgbClr val="FF6200"/>
                     </a:solidFill>
                     <a:lnL>
                       <a:noFill/>
@@ -10877,7 +10877,7 @@
                       <a:r>
                         <a:rPr sz="1300" b="1">
                           <a:solidFill>
-                            <a:srgbClr val="1F1F1F"/>
+                            <a:srgbClr val="FFFFFF"/>
                           </a:solidFill>
                           <a:latin typeface="Calibri"/>
                         </a:rPr>
@@ -10887,7 +10887,7 @@
                   </a:txBody>
                   <a:tcPr marL="91440" marR="91440" marT="41148" marB="41148" anchor="ctr">
                     <a:solidFill>
-                      <a:srgbClr val="EC7000"/>
+                      <a:srgbClr val="FF6200"/>
                     </a:solidFill>
                     <a:lnL>
                       <a:noFill/>
@@ -10926,7 +10926,7 @@
                       <a:r>
                         <a:rPr sz="1300" b="1">
                           <a:solidFill>
-                            <a:srgbClr val="1F1F1F"/>
+                            <a:srgbClr val="FFFFFF"/>
                           </a:solidFill>
                           <a:latin typeface="Calibri"/>
                         </a:rPr>
@@ -10936,7 +10936,7 @@
                   </a:txBody>
                   <a:tcPr marL="91440" marR="91440" marT="41148" marB="41148" anchor="ctr">
                     <a:solidFill>
-                      <a:srgbClr val="EC7000"/>
+                      <a:srgbClr val="FF6200"/>
                     </a:solidFill>
                     <a:lnL>
                       <a:noFill/>
@@ -10975,7 +10975,7 @@
                       <a:r>
                         <a:rPr sz="1300" b="1">
                           <a:solidFill>
-                            <a:srgbClr val="1F1F1F"/>
+                            <a:srgbClr val="FFFFFF"/>
                           </a:solidFill>
                           <a:latin typeface="Calibri"/>
                         </a:rPr>
@@ -10985,7 +10985,7 @@
                   </a:txBody>
                   <a:tcPr marL="91440" marR="91440" marT="41148" marB="41148" anchor="ctr">
                     <a:solidFill>
-                      <a:srgbClr val="EC7000"/>
+                      <a:srgbClr val="FF6200"/>
                     </a:solidFill>
                     <a:lnL>
                       <a:noFill/>
@@ -11024,7 +11024,7 @@
                       <a:r>
                         <a:rPr sz="1300" b="1">
                           <a:solidFill>
-                            <a:srgbClr val="1F1F1F"/>
+                            <a:srgbClr val="FFFFFF"/>
                           </a:solidFill>
                           <a:latin typeface="Calibri"/>
                         </a:rPr>
@@ -11034,7 +11034,7 @@
                   </a:txBody>
                   <a:tcPr marL="91440" marR="91440" marT="41148" marB="41148" anchor="ctr">
                     <a:solidFill>
-                      <a:srgbClr val="EC7000"/>
+                      <a:srgbClr val="FF6200"/>
                     </a:solidFill>
                     <a:lnL>
                       <a:noFill/>
@@ -13041,7 +13041,7 @@
         </p:nvGraphicFramePr>
         <p:xfrm>
           <a:off x="438912" y="932688"/>
-          <a:ext cx="11313868" cy="3022091"/>
+          <a:ext cx="11313868" cy="2647187"/>
         </p:xfrm>
         <a:graphic>
           <a:graphicData uri="http://schemas.openxmlformats.org/drawingml/2006/table">
@@ -13078,7 +13078,7 @@
                       <a:r>
                         <a:rPr sz="1300" b="1">
                           <a:solidFill>
-                            <a:srgbClr val="1F1F1F"/>
+                            <a:srgbClr val="FFFFFF"/>
                           </a:solidFill>
                           <a:latin typeface="Calibri"/>
                         </a:rPr>
@@ -13088,7 +13088,7 @@
                   </a:txBody>
                   <a:tcPr marL="91440" marR="91440" marT="41148" marB="41148" anchor="ctr">
                     <a:solidFill>
-                      <a:srgbClr val="EC7000"/>
+                      <a:srgbClr val="FF6200"/>
                     </a:solidFill>
                     <a:lnL>
                       <a:noFill/>
@@ -13127,7 +13127,7 @@
                       <a:r>
                         <a:rPr sz="1300" b="1">
                           <a:solidFill>
-                            <a:srgbClr val="1F1F1F"/>
+                            <a:srgbClr val="FFFFFF"/>
                           </a:solidFill>
                           <a:latin typeface="Calibri"/>
                         </a:rPr>
@@ -13137,7 +13137,7 @@
                   </a:txBody>
                   <a:tcPr marL="91440" marR="91440" marT="41148" marB="41148" anchor="ctr">
                     <a:solidFill>
-                      <a:srgbClr val="EC7000"/>
+                      <a:srgbClr val="FF6200"/>
                     </a:solidFill>
                     <a:lnL>
                       <a:noFill/>
@@ -13176,7 +13176,7 @@
                       <a:r>
                         <a:rPr sz="1300" b="1">
                           <a:solidFill>
-                            <a:srgbClr val="1F1F1F"/>
+                            <a:srgbClr val="FFFFFF"/>
                           </a:solidFill>
                           <a:latin typeface="Calibri"/>
                         </a:rPr>
@@ -13186,7 +13186,7 @@
                   </a:txBody>
                   <a:tcPr marL="91440" marR="91440" marT="41148" marB="41148" anchor="ctr">
                     <a:solidFill>
-                      <a:srgbClr val="EC7000"/>
+                      <a:srgbClr val="FF6200"/>
                     </a:solidFill>
                     <a:lnL>
                       <a:noFill/>
@@ -13225,7 +13225,7 @@
                       <a:r>
                         <a:rPr sz="1300" b="1">
                           <a:solidFill>
-                            <a:srgbClr val="1F1F1F"/>
+                            <a:srgbClr val="FFFFFF"/>
                           </a:solidFill>
                           <a:latin typeface="Calibri"/>
                         </a:rPr>
@@ -13235,7 +13235,7 @@
                   </a:txBody>
                   <a:tcPr marL="91440" marR="91440" marT="41148" marB="41148" anchor="ctr">
                     <a:solidFill>
-                      <a:srgbClr val="EC7000"/>
+                      <a:srgbClr val="FF6200"/>
                     </a:solidFill>
                     <a:lnL>
                       <a:noFill/>
@@ -13274,7 +13274,7 @@
                       <a:r>
                         <a:rPr sz="1300" b="1">
                           <a:solidFill>
-                            <a:srgbClr val="1F1F1F"/>
+                            <a:srgbClr val="FFFFFF"/>
                           </a:solidFill>
                           <a:latin typeface="Calibri"/>
                         </a:rPr>
@@ -13284,7 +13284,7 @@
                   </a:txBody>
                   <a:tcPr marL="91440" marR="91440" marT="41148" marB="41148" anchor="ctr">
                     <a:solidFill>
-                      <a:srgbClr val="EC7000"/>
+                      <a:srgbClr val="FF6200"/>
                     </a:solidFill>
                     <a:lnL>
                       <a:noFill/>
@@ -13303,7 +13303,7 @@
                   </a:tcPr>
                 </a:tc>
               </a:tr>
-              <a:tr h="1408175">
+              <a:tr h="1033271">
                 <a:tc>
                   <a:txBody>
                     <a:bodyPr wrap="square">
@@ -13464,51 +13464,7 @@
                           </a:solidFill>
                           <a:latin typeface="Calibri"/>
                         </a:rPr>
-                        <a:t>condições por emissão;</a:t>
-                      </a:r>
-                    </a:p>
-                    <a:p>
-                      <a:pPr algn="ctr">
-                        <a:lnSpc>
-                          <a:spcPct val="100000"/>
-                        </a:lnSpc>
-                        <a:spcBef>
-                          <a:spcPts val="0"/>
-                        </a:spcBef>
-                        <a:spcAft>
-                          <a:spcPts val="0"/>
-                        </a:spcAft>
-                      </a:pPr>
-                      <a:r>
-                        <a:rPr sz="1300" b="0">
-                          <a:solidFill>
-                            <a:srgbClr val="1F1F1F"/>
-                          </a:solidFill>
-                          <a:latin typeface="Calibri"/>
-                        </a:rPr>
-                        <a:t>percentual uniforme não</a:t>
-                      </a:r>
-                    </a:p>
-                    <a:p>
-                      <a:pPr algn="ctr">
-                        <a:lnSpc>
-                          <a:spcPct val="100000"/>
-                        </a:lnSpc>
-                        <a:spcBef>
-                          <a:spcPts val="0"/>
-                        </a:spcBef>
-                        <a:spcAft>
-                          <a:spcPts val="0"/>
-                        </a:spcAft>
-                      </a:pPr>
-                      <a:r>
-                        <a:rPr sz="1300" b="0">
-                          <a:solidFill>
-                            <a:srgbClr val="1F1F1F"/>
-                          </a:solidFill>
-                          <a:latin typeface="Calibri"/>
-                        </a:rPr>
-                        <a:t>confirmado.</a:t>
+                        <a:t>condições por emissão</a:t>
                       </a:r>
                     </a:p>
                   </a:txBody>
@@ -13643,51 +13599,7 @@
                           </a:solidFill>
                           <a:latin typeface="Calibri"/>
                         </a:rPr>
-                        <a:t>condições por emissão;</a:t>
-                      </a:r>
-                    </a:p>
-                    <a:p>
-                      <a:pPr algn="ctr">
-                        <a:lnSpc>
-                          <a:spcPct val="100000"/>
-                        </a:lnSpc>
-                        <a:spcBef>
-                          <a:spcPts val="0"/>
-                        </a:spcBef>
-                        <a:spcAft>
-                          <a:spcPts val="0"/>
-                        </a:spcAft>
-                      </a:pPr>
-                      <a:r>
-                        <a:rPr sz="1300" b="0">
-                          <a:solidFill>
-                            <a:srgbClr val="1F1F1F"/>
-                          </a:solidFill>
-                          <a:latin typeface="Calibri"/>
-                        </a:rPr>
-                        <a:t>percentual uniforme não</a:t>
-                      </a:r>
-                    </a:p>
-                    <a:p>
-                      <a:pPr algn="ctr">
-                        <a:lnSpc>
-                          <a:spcPct val="100000"/>
-                        </a:lnSpc>
-                        <a:spcBef>
-                          <a:spcPts val="0"/>
-                        </a:spcBef>
-                        <a:spcAft>
-                          <a:spcPts val="0"/>
-                        </a:spcAft>
-                      </a:pPr>
-                      <a:r>
-                        <a:rPr sz="1300" b="0">
-                          <a:solidFill>
-                            <a:srgbClr val="1F1F1F"/>
-                          </a:solidFill>
-                          <a:latin typeface="Calibri"/>
-                        </a:rPr>
-                        <a:t>confirmado.</a:t>
+                        <a:t>condições por emissão</a:t>
                       </a:r>
                     </a:p>
                   </a:txBody>
@@ -13822,51 +13734,7 @@
                           </a:solidFill>
                           <a:latin typeface="Calibri"/>
                         </a:rPr>
-                        <a:t>condições por emissão;</a:t>
-                      </a:r>
-                    </a:p>
-                    <a:p>
-                      <a:pPr algn="ctr">
-                        <a:lnSpc>
-                          <a:spcPct val="100000"/>
-                        </a:lnSpc>
-                        <a:spcBef>
-                          <a:spcPts val="0"/>
-                        </a:spcBef>
-                        <a:spcAft>
-                          <a:spcPts val="0"/>
-                        </a:spcAft>
-                      </a:pPr>
-                      <a:r>
-                        <a:rPr sz="1300" b="0">
-                          <a:solidFill>
-                            <a:srgbClr val="1F1F1F"/>
-                          </a:solidFill>
-                          <a:latin typeface="Calibri"/>
-                        </a:rPr>
-                        <a:t>percentual uniforme não</a:t>
-                      </a:r>
-                    </a:p>
-                    <a:p>
-                      <a:pPr algn="ctr">
-                        <a:lnSpc>
-                          <a:spcPct val="100000"/>
-                        </a:lnSpc>
-                        <a:spcBef>
-                          <a:spcPts val="0"/>
-                        </a:spcBef>
-                        <a:spcAft>
-                          <a:spcPts val="0"/>
-                        </a:spcAft>
-                      </a:pPr>
-                      <a:r>
-                        <a:rPr sz="1300" b="0">
-                          <a:solidFill>
-                            <a:srgbClr val="1F1F1F"/>
-                          </a:solidFill>
-                          <a:latin typeface="Calibri"/>
-                        </a:rPr>
-                        <a:t>confirmado.</a:t>
+                        <a:t>condições por emissão</a:t>
                       </a:r>
                     </a:p>
                   </a:txBody>
@@ -14783,7 +14651,7 @@
                       <a:r>
                         <a:rPr sz="1300" b="1">
                           <a:solidFill>
-                            <a:srgbClr val="1F1F1F"/>
+                            <a:srgbClr val="FFFFFF"/>
                           </a:solidFill>
                           <a:latin typeface="Calibri"/>
                         </a:rPr>
@@ -14793,7 +14661,7 @@
                   </a:txBody>
                   <a:tcPr marL="91440" marR="91440" marT="41148" marB="41148" anchor="ctr">
                     <a:solidFill>
-                      <a:srgbClr val="EC7000"/>
+                      <a:srgbClr val="FF6200"/>
                     </a:solidFill>
                     <a:lnL>
                       <a:noFill/>
@@ -14832,7 +14700,7 @@
                       <a:r>
                         <a:rPr sz="1300" b="1">
                           <a:solidFill>
-                            <a:srgbClr val="1F1F1F"/>
+                            <a:srgbClr val="FFFFFF"/>
                           </a:solidFill>
                           <a:latin typeface="Calibri"/>
                         </a:rPr>
@@ -14842,7 +14710,7 @@
                   </a:txBody>
                   <a:tcPr marL="91440" marR="91440" marT="41148" marB="41148" anchor="ctr">
                     <a:solidFill>
-                      <a:srgbClr val="EC7000"/>
+                      <a:srgbClr val="FF6200"/>
                     </a:solidFill>
                     <a:lnL>
                       <a:noFill/>
@@ -14881,7 +14749,7 @@
                       <a:r>
                         <a:rPr sz="1300" b="1">
                           <a:solidFill>
-                            <a:srgbClr val="1F1F1F"/>
+                            <a:srgbClr val="FFFFFF"/>
                           </a:solidFill>
                           <a:latin typeface="Calibri"/>
                         </a:rPr>
@@ -14891,7 +14759,7 @@
                   </a:txBody>
                   <a:tcPr marL="91440" marR="91440" marT="41148" marB="41148" anchor="ctr">
                     <a:solidFill>
-                      <a:srgbClr val="EC7000"/>
+                      <a:srgbClr val="FF6200"/>
                     </a:solidFill>
                     <a:lnL>
                       <a:noFill/>
@@ -14930,7 +14798,7 @@
                       <a:r>
                         <a:rPr sz="1300" b="1">
                           <a:solidFill>
-                            <a:srgbClr val="1F1F1F"/>
+                            <a:srgbClr val="FFFFFF"/>
                           </a:solidFill>
                           <a:latin typeface="Calibri"/>
                         </a:rPr>
@@ -14940,7 +14808,7 @@
                   </a:txBody>
                   <a:tcPr marL="91440" marR="91440" marT="41148" marB="41148" anchor="ctr">
                     <a:solidFill>
-                      <a:srgbClr val="EC7000"/>
+                      <a:srgbClr val="FF6200"/>
                     </a:solidFill>
                     <a:lnL>
                       <a:noFill/>
@@ -14979,7 +14847,7 @@
                       <a:r>
                         <a:rPr sz="1300" b="1">
                           <a:solidFill>
-                            <a:srgbClr val="1F1F1F"/>
+                            <a:srgbClr val="FFFFFF"/>
                           </a:solidFill>
                           <a:latin typeface="Calibri"/>
                         </a:rPr>
@@ -14989,7 +14857,7 @@
                   </a:txBody>
                   <a:tcPr marL="91440" marR="91440" marT="41148" marB="41148" anchor="ctr">
                     <a:solidFill>
-                      <a:srgbClr val="EC7000"/>
+                      <a:srgbClr val="FF6200"/>
                     </a:solidFill>
                     <a:lnL>
                       <a:noFill/>
@@ -17128,7 +16996,7 @@
         </p:nvGraphicFramePr>
         <p:xfrm>
           <a:off x="438912" y="932688"/>
-          <a:ext cx="11313868" cy="3867911"/>
+          <a:ext cx="11313868" cy="3305555"/>
         </p:xfrm>
         <a:graphic>
           <a:graphicData uri="http://schemas.openxmlformats.org/drawingml/2006/table">
@@ -17165,7 +17033,7 @@
                       <a:r>
                         <a:rPr sz="1300" b="1">
                           <a:solidFill>
-                            <a:srgbClr val="1F1F1F"/>
+                            <a:srgbClr val="FFFFFF"/>
                           </a:solidFill>
                           <a:latin typeface="Calibri"/>
                         </a:rPr>
@@ -17175,7 +17043,7 @@
                   </a:txBody>
                   <a:tcPr marL="91440" marR="91440" marT="41148" marB="41148" anchor="ctr">
                     <a:solidFill>
-                      <a:srgbClr val="EC7000"/>
+                      <a:srgbClr val="FF6200"/>
                     </a:solidFill>
                     <a:lnL>
                       <a:noFill/>
@@ -17214,7 +17082,7 @@
                       <a:r>
                         <a:rPr sz="1300" b="1">
                           <a:solidFill>
-                            <a:srgbClr val="1F1F1F"/>
+                            <a:srgbClr val="FFFFFF"/>
                           </a:solidFill>
                           <a:latin typeface="Calibri"/>
                         </a:rPr>
@@ -17224,7 +17092,7 @@
                   </a:txBody>
                   <a:tcPr marL="91440" marR="91440" marT="41148" marB="41148" anchor="ctr">
                     <a:solidFill>
-                      <a:srgbClr val="EC7000"/>
+                      <a:srgbClr val="FF6200"/>
                     </a:solidFill>
                     <a:lnL>
                       <a:noFill/>
@@ -17263,7 +17131,7 @@
                       <a:r>
                         <a:rPr sz="1300" b="1">
                           <a:solidFill>
-                            <a:srgbClr val="1F1F1F"/>
+                            <a:srgbClr val="FFFFFF"/>
                           </a:solidFill>
                           <a:latin typeface="Calibri"/>
                         </a:rPr>
@@ -17273,7 +17141,7 @@
                   </a:txBody>
                   <a:tcPr marL="91440" marR="91440" marT="41148" marB="41148" anchor="ctr">
                     <a:solidFill>
-                      <a:srgbClr val="EC7000"/>
+                      <a:srgbClr val="FF6200"/>
                     </a:solidFill>
                     <a:lnL>
                       <a:noFill/>
@@ -17312,7 +17180,7 @@
                       <a:r>
                         <a:rPr sz="1300" b="1">
                           <a:solidFill>
-                            <a:srgbClr val="1F1F1F"/>
+                            <a:srgbClr val="FFFFFF"/>
                           </a:solidFill>
                           <a:latin typeface="Calibri"/>
                         </a:rPr>
@@ -17322,7 +17190,7 @@
                   </a:txBody>
                   <a:tcPr marL="91440" marR="91440" marT="41148" marB="41148" anchor="ctr">
                     <a:solidFill>
-                      <a:srgbClr val="EC7000"/>
+                      <a:srgbClr val="FF6200"/>
                     </a:solidFill>
                     <a:lnL>
                       <a:noFill/>
@@ -17361,7 +17229,7 @@
                       <a:r>
                         <a:rPr sz="1300" b="1">
                           <a:solidFill>
-                            <a:srgbClr val="1F1F1F"/>
+                            <a:srgbClr val="FFFFFF"/>
                           </a:solidFill>
                           <a:latin typeface="Calibri"/>
                         </a:rPr>
@@ -17371,7 +17239,7 @@
                   </a:txBody>
                   <a:tcPr marL="91440" marR="91440" marT="41148" marB="41148" anchor="ctr">
                     <a:solidFill>
-                      <a:srgbClr val="EC7000"/>
+                      <a:srgbClr val="FF6200"/>
                     </a:solidFill>
                     <a:lnL>
                       <a:noFill/>
@@ -17390,7 +17258,7 @@
                   </a:tcPr>
                 </a:tc>
               </a:tr>
-              <a:tr h="1220724">
+              <a:tr h="658368">
                 <a:tc>
                   <a:txBody>
                     <a:bodyPr wrap="square">
@@ -17485,95 +17353,7 @@
                           </a:solidFill>
                           <a:latin typeface="Calibri"/>
                         </a:rPr>
-                        <a:t>definida no</a:t>
-                      </a:r>
-                    </a:p>
-                    <a:p>
-                      <a:pPr algn="ctr">
-                        <a:lnSpc>
-                          <a:spcPct val="100000"/>
-                        </a:lnSpc>
-                        <a:spcBef>
-                          <a:spcPts val="0"/>
-                        </a:spcBef>
-                        <a:spcAft>
-                          <a:spcPts val="0"/>
-                        </a:spcAft>
-                      </a:pPr>
-                      <a:r>
-                        <a:rPr sz="1300" b="0">
-                          <a:solidFill>
-                            <a:srgbClr val="1F1F1F"/>
-                          </a:solidFill>
-                          <a:latin typeface="Calibri"/>
-                        </a:rPr>
-                        <a:t>regulamento; percentual</a:t>
-                      </a:r>
-                    </a:p>
-                    <a:p>
-                      <a:pPr algn="ctr">
-                        <a:lnSpc>
-                          <a:spcPct val="100000"/>
-                        </a:lnSpc>
-                        <a:spcBef>
-                          <a:spcPts val="0"/>
-                        </a:spcBef>
-                        <a:spcAft>
-                          <a:spcPts val="0"/>
-                        </a:spcAft>
-                      </a:pPr>
-                      <a:r>
-                        <a:rPr sz="1300" b="0">
-                          <a:solidFill>
-                            <a:srgbClr val="1F1F1F"/>
-                          </a:solidFill>
-                          <a:latin typeface="Calibri"/>
-                        </a:rPr>
-                        <a:t>não transcrito sem</a:t>
-                      </a:r>
-                    </a:p>
-                    <a:p>
-                      <a:pPr algn="ctr">
-                        <a:lnSpc>
-                          <a:spcPct val="100000"/>
-                        </a:lnSpc>
-                        <a:spcBef>
-                          <a:spcPts val="0"/>
-                        </a:spcBef>
-                        <a:spcAft>
-                          <a:spcPts val="0"/>
-                        </a:spcAft>
-                      </a:pPr>
-                      <a:r>
-                        <a:rPr sz="1300" b="0">
-                          <a:solidFill>
-                            <a:srgbClr val="1F1F1F"/>
-                          </a:solidFill>
-                          <a:latin typeface="Calibri"/>
-                        </a:rPr>
-                        <a:t>reconciliar definições</a:t>
-                      </a:r>
-                    </a:p>
-                    <a:p>
-                      <a:pPr algn="ctr">
-                        <a:lnSpc>
-                          <a:spcPct val="100000"/>
-                        </a:lnSpc>
-                        <a:spcBef>
-                          <a:spcPts val="0"/>
-                        </a:spcBef>
-                        <a:spcAft>
-                          <a:spcPts val="0"/>
-                        </a:spcAft>
-                      </a:pPr>
-                      <a:r>
-                        <a:rPr sz="1300" b="0">
-                          <a:solidFill>
-                            <a:srgbClr val="1F1F1F"/>
-                          </a:solidFill>
-                          <a:latin typeface="Calibri"/>
-                        </a:rPr>
-                        <a:t>e anexos.</a:t>
+                        <a:t>definida no regulamento</a:t>
                       </a:r>
                     </a:p>
                   </a:txBody>
@@ -17664,73 +17444,7 @@
                           </a:solidFill>
                           <a:latin typeface="Calibri"/>
                         </a:rPr>
-                        <a:t>de enquadramento; piso</a:t>
-                      </a:r>
-                    </a:p>
-                    <a:p>
-                      <a:pPr algn="ctr">
-                        <a:lnSpc>
-                          <a:spcPct val="100000"/>
-                        </a:lnSpc>
-                        <a:spcBef>
-                          <a:spcPts val="0"/>
-                        </a:spcBef>
-                        <a:spcAft>
-                          <a:spcPts val="0"/>
-                        </a:spcAft>
-                      </a:pPr>
-                      <a:r>
-                        <a:rPr sz="1300" b="0">
-                          <a:solidFill>
-                            <a:srgbClr val="1F1F1F"/>
-                          </a:solidFill>
-                          <a:latin typeface="Calibri"/>
-                        </a:rPr>
-                        <a:t>exato não transcrito</a:t>
-                      </a:r>
-                    </a:p>
-                    <a:p>
-                      <a:pPr algn="ctr">
-                        <a:lnSpc>
-                          <a:spcPct val="100000"/>
-                        </a:lnSpc>
-                        <a:spcBef>
-                          <a:spcPts val="0"/>
-                        </a:spcBef>
-                        <a:spcAft>
-                          <a:spcPts val="0"/>
-                        </a:spcAft>
-                      </a:pPr>
-                      <a:r>
-                        <a:rPr sz="1300" b="0">
-                          <a:solidFill>
-                            <a:srgbClr val="1F1F1F"/>
-                          </a:solidFill>
-                          <a:latin typeface="Calibri"/>
-                        </a:rPr>
-                        <a:t>sem reconciliação das</a:t>
-                      </a:r>
-                    </a:p>
-                    <a:p>
-                      <a:pPr algn="ctr">
-                        <a:lnSpc>
-                          <a:spcPct val="100000"/>
-                        </a:lnSpc>
-                        <a:spcBef>
-                          <a:spcPts val="0"/>
-                        </a:spcBef>
-                        <a:spcAft>
-                          <a:spcPts val="0"/>
-                        </a:spcAft>
-                      </a:pPr>
-                      <a:r>
-                        <a:rPr sz="1300" b="0">
-                          <a:solidFill>
-                            <a:srgbClr val="1F1F1F"/>
-                          </a:solidFill>
-                          <a:latin typeface="Calibri"/>
-                        </a:rPr>
-                        <a:t>definições.</a:t>
+                        <a:t>de enquadramento</a:t>
                       </a:r>
                     </a:p>
                   </a:txBody>
@@ -19312,7 +19026,7 @@
         </p:nvGraphicFramePr>
         <p:xfrm>
           <a:off x="438912" y="932688"/>
-          <a:ext cx="11313868" cy="3867911"/>
+          <a:ext cx="11313868" cy="3305555"/>
         </p:xfrm>
         <a:graphic>
           <a:graphicData uri="http://schemas.openxmlformats.org/drawingml/2006/table">
@@ -19349,7 +19063,7 @@
                       <a:r>
                         <a:rPr sz="1300" b="1">
                           <a:solidFill>
-                            <a:srgbClr val="1F1F1F"/>
+                            <a:srgbClr val="FFFFFF"/>
                           </a:solidFill>
                           <a:latin typeface="Calibri"/>
                         </a:rPr>
@@ -19359,7 +19073,7 @@
                   </a:txBody>
                   <a:tcPr marL="91440" marR="91440" marT="41148" marB="41148" anchor="ctr">
                     <a:solidFill>
-                      <a:srgbClr val="EC7000"/>
+                      <a:srgbClr val="FF6200"/>
                     </a:solidFill>
                     <a:lnL>
                       <a:noFill/>
@@ -19398,7 +19112,7 @@
                       <a:r>
                         <a:rPr sz="1300" b="1">
                           <a:solidFill>
-                            <a:srgbClr val="1F1F1F"/>
+                            <a:srgbClr val="FFFFFF"/>
                           </a:solidFill>
                           <a:latin typeface="Calibri"/>
                         </a:rPr>
@@ -19408,7 +19122,7 @@
                   </a:txBody>
                   <a:tcPr marL="91440" marR="91440" marT="41148" marB="41148" anchor="ctr">
                     <a:solidFill>
-                      <a:srgbClr val="EC7000"/>
+                      <a:srgbClr val="FF6200"/>
                     </a:solidFill>
                     <a:lnL>
                       <a:noFill/>
@@ -19447,7 +19161,7 @@
                       <a:r>
                         <a:rPr sz="1300" b="1">
                           <a:solidFill>
-                            <a:srgbClr val="1F1F1F"/>
+                            <a:srgbClr val="FFFFFF"/>
                           </a:solidFill>
                           <a:latin typeface="Calibri"/>
                         </a:rPr>
@@ -19457,7 +19171,7 @@
                   </a:txBody>
                   <a:tcPr marL="91440" marR="91440" marT="41148" marB="41148" anchor="ctr">
                     <a:solidFill>
-                      <a:srgbClr val="EC7000"/>
+                      <a:srgbClr val="FF6200"/>
                     </a:solidFill>
                     <a:lnL>
                       <a:noFill/>
@@ -19496,7 +19210,7 @@
                       <a:r>
                         <a:rPr sz="1300" b="1">
                           <a:solidFill>
-                            <a:srgbClr val="1F1F1F"/>
+                            <a:srgbClr val="FFFFFF"/>
                           </a:solidFill>
                           <a:latin typeface="Calibri"/>
                         </a:rPr>
@@ -19506,7 +19220,7 @@
                   </a:txBody>
                   <a:tcPr marL="91440" marR="91440" marT="41148" marB="41148" anchor="ctr">
                     <a:solidFill>
-                      <a:srgbClr val="EC7000"/>
+                      <a:srgbClr val="FF6200"/>
                     </a:solidFill>
                     <a:lnL>
                       <a:noFill/>
@@ -19545,7 +19259,7 @@
                       <a:r>
                         <a:rPr sz="1300" b="1">
                           <a:solidFill>
-                            <a:srgbClr val="1F1F1F"/>
+                            <a:srgbClr val="FFFFFF"/>
                           </a:solidFill>
                           <a:latin typeface="Calibri"/>
                         </a:rPr>
@@ -19555,7 +19269,7 @@
                   </a:txBody>
                   <a:tcPr marL="91440" marR="91440" marT="41148" marB="41148" anchor="ctr">
                     <a:solidFill>
-                      <a:srgbClr val="EC7000"/>
+                      <a:srgbClr val="FF6200"/>
                     </a:solidFill>
                     <a:lnL>
                       <a:noFill/>
@@ -19574,7 +19288,7 @@
                   </a:tcPr>
                 </a:tc>
               </a:tr>
-              <a:tr h="1220724">
+              <a:tr h="658368">
                 <a:tc>
                   <a:txBody>
                     <a:bodyPr wrap="square">
@@ -19647,72 +19361,6 @@
                           </a:solidFill>
                           <a:latin typeface="Calibri"/>
                         </a:rPr>
-                        <a:t>Condições de cessão,</a:t>
-                      </a:r>
-                    </a:p>
-                    <a:p>
-                      <a:pPr algn="ctr">
-                        <a:lnSpc>
-                          <a:spcPct val="100000"/>
-                        </a:lnSpc>
-                        <a:spcBef>
-                          <a:spcPts val="0"/>
-                        </a:spcBef>
-                        <a:spcAft>
-                          <a:spcPts val="0"/>
-                        </a:spcAft>
-                      </a:pPr>
-                      <a:r>
-                        <a:rPr sz="1300" b="0">
-                          <a:solidFill>
-                            <a:srgbClr val="1F1F1F"/>
-                          </a:solidFill>
-                          <a:latin typeface="Calibri"/>
-                        </a:rPr>
-                        <a:t>resolução e recompra em</a:t>
-                      </a:r>
-                    </a:p>
-                    <a:p>
-                      <a:pPr algn="ctr">
-                        <a:lnSpc>
-                          <a:spcPct val="100000"/>
-                        </a:lnSpc>
-                        <a:spcBef>
-                          <a:spcPts val="0"/>
-                        </a:spcBef>
-                        <a:spcAft>
-                          <a:spcPts val="0"/>
-                        </a:spcAft>
-                      </a:pPr>
-                      <a:r>
-                        <a:rPr sz="1300" b="0">
-                          <a:solidFill>
-                            <a:srgbClr val="1F1F1F"/>
-                          </a:solidFill>
-                          <a:latin typeface="Calibri"/>
-                        </a:rPr>
-                        <a:t>contratos;</a:t>
-                      </a:r>
-                    </a:p>
-                    <a:p>
-                      <a:pPr algn="ctr">
-                        <a:lnSpc>
-                          <a:spcPct val="100000"/>
-                        </a:lnSpc>
-                        <a:spcBef>
-                          <a:spcPts val="0"/>
-                        </a:spcBef>
-                        <a:spcAft>
-                          <a:spcPts val="0"/>
-                        </a:spcAft>
-                      </a:pPr>
-                      <a:r>
-                        <a:rPr sz="1300" b="0">
-                          <a:solidFill>
-                            <a:srgbClr val="1F1F1F"/>
-                          </a:solidFill>
-                          <a:latin typeface="Calibri"/>
-                        </a:rPr>
                         <a:t>vícios/culpa/dolo</a:t>
                       </a:r>
                     </a:p>
@@ -19804,72 +19452,6 @@
                           </a:solidFill>
                           <a:latin typeface="Calibri"/>
                         </a:rPr>
-                        <a:t>Condições de cessão,</a:t>
-                      </a:r>
-                    </a:p>
-                    <a:p>
-                      <a:pPr algn="ctr">
-                        <a:lnSpc>
-                          <a:spcPct val="100000"/>
-                        </a:lnSpc>
-                        <a:spcBef>
-                          <a:spcPts val="0"/>
-                        </a:spcBef>
-                        <a:spcAft>
-                          <a:spcPts val="0"/>
-                        </a:spcAft>
-                      </a:pPr>
-                      <a:r>
-                        <a:rPr sz="1300" b="0">
-                          <a:solidFill>
-                            <a:srgbClr val="1F1F1F"/>
-                          </a:solidFill>
-                          <a:latin typeface="Calibri"/>
-                        </a:rPr>
-                        <a:t>resolução e recompra em</a:t>
-                      </a:r>
-                    </a:p>
-                    <a:p>
-                      <a:pPr algn="ctr">
-                        <a:lnSpc>
-                          <a:spcPct val="100000"/>
-                        </a:lnSpc>
-                        <a:spcBef>
-                          <a:spcPts val="0"/>
-                        </a:spcBef>
-                        <a:spcAft>
-                          <a:spcPts val="0"/>
-                        </a:spcAft>
-                      </a:pPr>
-                      <a:r>
-                        <a:rPr sz="1300" b="0">
-                          <a:solidFill>
-                            <a:srgbClr val="1F1F1F"/>
-                          </a:solidFill>
-                          <a:latin typeface="Calibri"/>
-                        </a:rPr>
-                        <a:t>contratos;</a:t>
-                      </a:r>
-                    </a:p>
-                    <a:p>
-                      <a:pPr algn="ctr">
-                        <a:lnSpc>
-                          <a:spcPct val="100000"/>
-                        </a:lnSpc>
-                        <a:spcBef>
-                          <a:spcPts val="0"/>
-                        </a:spcBef>
-                        <a:spcAft>
-                          <a:spcPts val="0"/>
-                        </a:spcAft>
-                      </a:pPr>
-                      <a:r>
-                        <a:rPr sz="1300" b="0">
-                          <a:solidFill>
-                            <a:srgbClr val="1F1F1F"/>
-                          </a:solidFill>
-                          <a:latin typeface="Calibri"/>
-                        </a:rPr>
                         <a:t>vícios/culpa/dolo</a:t>
                       </a:r>
                     </a:p>
@@ -19961,72 +19543,6 @@
                           </a:solidFill>
                           <a:latin typeface="Calibri"/>
                         </a:rPr>
-                        <a:t>Condições de cessão,</a:t>
-                      </a:r>
-                    </a:p>
-                    <a:p>
-                      <a:pPr algn="ctr">
-                        <a:lnSpc>
-                          <a:spcPct val="100000"/>
-                        </a:lnSpc>
-                        <a:spcBef>
-                          <a:spcPts val="0"/>
-                        </a:spcBef>
-                        <a:spcAft>
-                          <a:spcPts val="0"/>
-                        </a:spcAft>
-                      </a:pPr>
-                      <a:r>
-                        <a:rPr sz="1300" b="0">
-                          <a:solidFill>
-                            <a:srgbClr val="1F1F1F"/>
-                          </a:solidFill>
-                          <a:latin typeface="Calibri"/>
-                        </a:rPr>
-                        <a:t>resolução e recompra em</a:t>
-                      </a:r>
-                    </a:p>
-                    <a:p>
-                      <a:pPr algn="ctr">
-                        <a:lnSpc>
-                          <a:spcPct val="100000"/>
-                        </a:lnSpc>
-                        <a:spcBef>
-                          <a:spcPts val="0"/>
-                        </a:spcBef>
-                        <a:spcAft>
-                          <a:spcPts val="0"/>
-                        </a:spcAft>
-                      </a:pPr>
-                      <a:r>
-                        <a:rPr sz="1300" b="0">
-                          <a:solidFill>
-                            <a:srgbClr val="1F1F1F"/>
-                          </a:solidFill>
-                          <a:latin typeface="Calibri"/>
-                        </a:rPr>
-                        <a:t>contratos;</a:t>
-                      </a:r>
-                    </a:p>
-                    <a:p>
-                      <a:pPr algn="ctr">
-                        <a:lnSpc>
-                          <a:spcPct val="100000"/>
-                        </a:lnSpc>
-                        <a:spcBef>
-                          <a:spcPts val="0"/>
-                        </a:spcBef>
-                        <a:spcAft>
-                          <a:spcPts val="0"/>
-                        </a:spcAft>
-                      </a:pPr>
-                      <a:r>
-                        <a:rPr sz="1300" b="0">
-                          <a:solidFill>
-                            <a:srgbClr val="1F1F1F"/>
-                          </a:solidFill>
-                          <a:latin typeface="Calibri"/>
-                        </a:rPr>
                         <a:t>vícios/culpa/dolo</a:t>
                       </a:r>
                     </a:p>
@@ -20099,72 +19615,6 @@
                       <a:noAutofit/>
                     </a:bodyPr>
                     <a:lstStyle/>
-                    <a:p>
-                      <a:pPr algn="ctr">
-                        <a:lnSpc>
-                          <a:spcPct val="100000"/>
-                        </a:lnSpc>
-                        <a:spcBef>
-                          <a:spcPts val="0"/>
-                        </a:spcBef>
-                        <a:spcAft>
-                          <a:spcPts val="0"/>
-                        </a:spcAft>
-                      </a:pPr>
-                      <a:r>
-                        <a:rPr sz="1300" b="0">
-                          <a:solidFill>
-                            <a:srgbClr val="1F1F1F"/>
-                          </a:solidFill>
-                          <a:latin typeface="Calibri"/>
-                        </a:rPr>
-                        <a:t>Condições de cessão,</a:t>
-                      </a:r>
-                    </a:p>
-                    <a:p>
-                      <a:pPr algn="ctr">
-                        <a:lnSpc>
-                          <a:spcPct val="100000"/>
-                        </a:lnSpc>
-                        <a:spcBef>
-                          <a:spcPts val="0"/>
-                        </a:spcBef>
-                        <a:spcAft>
-                          <a:spcPts val="0"/>
-                        </a:spcAft>
-                      </a:pPr>
-                      <a:r>
-                        <a:rPr sz="1300" b="0">
-                          <a:solidFill>
-                            <a:srgbClr val="1F1F1F"/>
-                          </a:solidFill>
-                          <a:latin typeface="Calibri"/>
-                        </a:rPr>
-                        <a:t>resolução e recompra em</a:t>
-                      </a:r>
-                    </a:p>
-                    <a:p>
-                      <a:pPr algn="ctr">
-                        <a:lnSpc>
-                          <a:spcPct val="100000"/>
-                        </a:lnSpc>
-                        <a:spcBef>
-                          <a:spcPts val="0"/>
-                        </a:spcBef>
-                        <a:spcAft>
-                          <a:spcPts val="0"/>
-                        </a:spcAft>
-                      </a:pPr>
-                      <a:r>
-                        <a:rPr sz="1300" b="0">
-                          <a:solidFill>
-                            <a:srgbClr val="1F1F1F"/>
-                          </a:solidFill>
-                          <a:latin typeface="Calibri"/>
-                        </a:rPr>
-                        <a:t>contratos;</a:t>
-                      </a:r>
-                    </a:p>
                     <a:p>
                       <a:pPr algn="ctr">
                         <a:lnSpc>
@@ -21672,7 +21122,7 @@
         </p:nvGraphicFramePr>
         <p:xfrm>
           <a:off x="438912" y="932688"/>
-          <a:ext cx="11313868" cy="4338827"/>
+          <a:ext cx="11313868" cy="2651760"/>
         </p:xfrm>
         <a:graphic>
           <a:graphicData uri="http://schemas.openxmlformats.org/drawingml/2006/table">
@@ -21709,7 +21159,7 @@
                       <a:r>
                         <a:rPr sz="1300" b="1">
                           <a:solidFill>
-                            <a:srgbClr val="1F1F1F"/>
+                            <a:srgbClr val="FFFFFF"/>
                           </a:solidFill>
                           <a:latin typeface="Calibri"/>
                         </a:rPr>
@@ -21719,7 +21169,7 @@
                   </a:txBody>
                   <a:tcPr marL="91440" marR="91440" marT="41148" marB="41148" anchor="ctr">
                     <a:solidFill>
-                      <a:srgbClr val="EC7000"/>
+                      <a:srgbClr val="FF6200"/>
                     </a:solidFill>
                     <a:lnL>
                       <a:noFill/>
@@ -21758,7 +21208,7 @@
                       <a:r>
                         <a:rPr sz="1300" b="1">
                           <a:solidFill>
-                            <a:srgbClr val="1F1F1F"/>
+                            <a:srgbClr val="FFFFFF"/>
                           </a:solidFill>
                           <a:latin typeface="Calibri"/>
                         </a:rPr>
@@ -21768,7 +21218,7 @@
                   </a:txBody>
                   <a:tcPr marL="91440" marR="91440" marT="41148" marB="41148" anchor="ctr">
                     <a:solidFill>
-                      <a:srgbClr val="EC7000"/>
+                      <a:srgbClr val="FF6200"/>
                     </a:solidFill>
                     <a:lnL>
                       <a:noFill/>
@@ -21807,7 +21257,7 @@
                       <a:r>
                         <a:rPr sz="1300" b="1">
                           <a:solidFill>
-                            <a:srgbClr val="1F1F1F"/>
+                            <a:srgbClr val="FFFFFF"/>
                           </a:solidFill>
                           <a:latin typeface="Calibri"/>
                         </a:rPr>
@@ -21817,7 +21267,7 @@
                   </a:txBody>
                   <a:tcPr marL="91440" marR="91440" marT="41148" marB="41148" anchor="ctr">
                     <a:solidFill>
-                      <a:srgbClr val="EC7000"/>
+                      <a:srgbClr val="FF6200"/>
                     </a:solidFill>
                     <a:lnL>
                       <a:noFill/>
@@ -21856,7 +21306,7 @@
                       <a:r>
                         <a:rPr sz="1300" b="1">
                           <a:solidFill>
-                            <a:srgbClr val="1F1F1F"/>
+                            <a:srgbClr val="FFFFFF"/>
                           </a:solidFill>
                           <a:latin typeface="Calibri"/>
                         </a:rPr>
@@ -21866,7 +21316,7 @@
                   </a:txBody>
                   <a:tcPr marL="91440" marR="91440" marT="41148" marB="41148" anchor="ctr">
                     <a:solidFill>
-                      <a:srgbClr val="EC7000"/>
+                      <a:srgbClr val="FF6200"/>
                     </a:solidFill>
                     <a:lnL>
                       <a:noFill/>
@@ -21905,7 +21355,7 @@
                       <a:r>
                         <a:rPr sz="1300" b="1">
                           <a:solidFill>
-                            <a:srgbClr val="1F1F1F"/>
+                            <a:srgbClr val="FFFFFF"/>
                           </a:solidFill>
                           <a:latin typeface="Calibri"/>
                         </a:rPr>
@@ -21915,7 +21365,7 @@
                   </a:txBody>
                   <a:tcPr marL="91440" marR="91440" marT="41148" marB="41148" anchor="ctr">
                     <a:solidFill>
-                      <a:srgbClr val="EC7000"/>
+                      <a:srgbClr val="FF6200"/>
                     </a:solidFill>
                     <a:lnL>
                       <a:noFill/>
@@ -21930,1228 +21380,6 @@
                       <a:solidFill>
                         <a:srgbClr val="D9DEE5"/>
                       </a:solidFill>
-                    </a:lnB>
-                  </a:tcPr>
-                </a:tc>
-              </a:tr>
-              <a:tr h="1220724">
-                <a:tc>
-                  <a:txBody>
-                    <a:bodyPr wrap="square">
-                      <a:noAutofit/>
-                    </a:bodyPr>
-                    <a:lstStyle/>
-                    <a:p>
-                      <a:pPr algn="l">
-                        <a:lnSpc>
-                          <a:spcPct val="100000"/>
-                        </a:lnSpc>
-                        <a:spcBef>
-                          <a:spcPts val="0"/>
-                        </a:spcBef>
-                        <a:spcAft>
-                          <a:spcPts val="0"/>
-                        </a:spcAft>
-                      </a:pPr>
-                      <a:r>
-                        <a:rPr sz="1300" b="1">
-                          <a:solidFill>
-                            <a:srgbClr val="1F1F1F"/>
-                          </a:solidFill>
-                          <a:latin typeface="Calibri"/>
-                        </a:rPr>
-                        <a:t>Classes/séries</a:t>
-                      </a:r>
-                    </a:p>
-                  </a:txBody>
-                  <a:tcPr marL="91440" marR="91440" marT="41148" marB="41148" anchor="ctr">
-                    <a:solidFill>
-                      <a:srgbClr val="FFFFFF"/>
-                    </a:solidFill>
-                    <a:lnL>
-                      <a:noFill/>
-                    </a:lnL>
-                    <a:lnR>
-                      <a:noFill/>
-                    </a:lnR>
-                    <a:lnT>
-                      <a:noFill/>
-                    </a:lnT>
-                    <a:lnB>
-                      <a:noFill/>
-                    </a:lnB>
-                  </a:tcPr>
-                </a:tc>
-                <a:tc>
-                  <a:txBody>
-                    <a:bodyPr wrap="square">
-                      <a:noAutofit/>
-                    </a:bodyPr>
-                    <a:lstStyle/>
-                    <a:p>
-                      <a:pPr algn="ctr">
-                        <a:lnSpc>
-                          <a:spcPct val="100000"/>
-                        </a:lnSpc>
-                        <a:spcBef>
-                          <a:spcPts val="0"/>
-                        </a:spcBef>
-                        <a:spcAft>
-                          <a:spcPts val="0"/>
-                        </a:spcAft>
-                      </a:pPr>
-                      <a:r>
-                        <a:rPr sz="1300" b="0">
-                          <a:solidFill>
-                            <a:srgbClr val="1F1F1F"/>
-                          </a:solidFill>
-                          <a:latin typeface="Calibri"/>
-                        </a:rPr>
-                        <a:t>Sênior, subordinadas</a:t>
-                      </a:r>
-                    </a:p>
-                    <a:p>
-                      <a:pPr algn="ctr">
-                        <a:lnSpc>
-                          <a:spcPct val="100000"/>
-                        </a:lnSpc>
-                        <a:spcBef>
-                          <a:spcPts val="0"/>
-                        </a:spcBef>
-                        <a:spcAft>
-                          <a:spcPts val="0"/>
-                        </a:spcAft>
-                      </a:pPr>
-                      <a:r>
-                        <a:rPr sz="1300" b="0">
-                          <a:solidFill>
-                            <a:srgbClr val="1F1F1F"/>
-                          </a:solidFill>
-                          <a:latin typeface="Calibri"/>
-                        </a:rPr>
-                        <a:t>mezanino e júnior;</a:t>
-                      </a:r>
-                    </a:p>
-                    <a:p>
-                      <a:pPr algn="ctr">
-                        <a:lnSpc>
-                          <a:spcPct val="100000"/>
-                        </a:lnSpc>
-                        <a:spcBef>
-                          <a:spcPts val="0"/>
-                        </a:spcBef>
-                        <a:spcAft>
-                          <a:spcPts val="0"/>
-                        </a:spcAft>
-                      </a:pPr>
-                      <a:r>
-                        <a:rPr sz="1300" b="0">
-                          <a:solidFill>
-                            <a:srgbClr val="1F1F1F"/>
-                          </a:solidFill>
-                          <a:latin typeface="Calibri"/>
-                        </a:rPr>
-                        <a:t>termos finais por série</a:t>
-                      </a:r>
-                    </a:p>
-                    <a:p>
-                      <a:pPr algn="ctr">
-                        <a:lnSpc>
-                          <a:spcPct val="100000"/>
-                        </a:lnSpc>
-                        <a:spcBef>
-                          <a:spcPts val="0"/>
-                        </a:spcBef>
-                        <a:spcAft>
-                          <a:spcPts val="0"/>
-                        </a:spcAft>
-                      </a:pPr>
-                      <a:r>
-                        <a:rPr sz="1300" b="0">
-                          <a:solidFill>
-                            <a:srgbClr val="1F1F1F"/>
-                          </a:solidFill>
-                          <a:latin typeface="Calibri"/>
-                        </a:rPr>
-                        <a:t>devem ser confirmados</a:t>
-                      </a:r>
-                    </a:p>
-                    <a:p>
-                      <a:pPr algn="ctr">
-                        <a:lnSpc>
-                          <a:spcPct val="100000"/>
-                        </a:lnSpc>
-                        <a:spcBef>
-                          <a:spcPts val="0"/>
-                        </a:spcBef>
-                        <a:spcAft>
-                          <a:spcPts val="0"/>
-                        </a:spcAft>
-                      </a:pPr>
-                      <a:r>
-                        <a:rPr sz="1300" b="0">
-                          <a:solidFill>
-                            <a:srgbClr val="1F1F1F"/>
-                          </a:solidFill>
-                          <a:latin typeface="Calibri"/>
-                        </a:rPr>
-                        <a:t>em apêndices.</a:t>
-                      </a:r>
-                    </a:p>
-                  </a:txBody>
-                  <a:tcPr marL="91440" marR="91440" marT="41148" marB="41148" anchor="ctr">
-                    <a:solidFill>
-                      <a:srgbClr val="FFFFFF"/>
-                    </a:solidFill>
-                    <a:lnL>
-                      <a:noFill/>
-                    </a:lnL>
-                    <a:lnR>
-                      <a:noFill/>
-                    </a:lnR>
-                    <a:lnT>
-                      <a:noFill/>
-                    </a:lnT>
-                    <a:lnB>
-                      <a:noFill/>
-                    </a:lnB>
-                  </a:tcPr>
-                </a:tc>
-                <a:tc>
-                  <a:txBody>
-                    <a:bodyPr wrap="square">
-                      <a:noAutofit/>
-                    </a:bodyPr>
-                    <a:lstStyle/>
-                    <a:p>
-                      <a:pPr algn="ctr">
-                        <a:lnSpc>
-                          <a:spcPct val="100000"/>
-                        </a:lnSpc>
-                        <a:spcBef>
-                          <a:spcPts val="0"/>
-                        </a:spcBef>
-                        <a:spcAft>
-                          <a:spcPts val="0"/>
-                        </a:spcAft>
-                      </a:pPr>
-                      <a:r>
-                        <a:rPr sz="1300" b="0">
-                          <a:solidFill>
-                            <a:srgbClr val="1F1F1F"/>
-                          </a:solidFill>
-                          <a:latin typeface="Calibri"/>
-                        </a:rPr>
-                        <a:t>Sênior, subordinadas</a:t>
-                      </a:r>
-                    </a:p>
-                    <a:p>
-                      <a:pPr algn="ctr">
-                        <a:lnSpc>
-                          <a:spcPct val="100000"/>
-                        </a:lnSpc>
-                        <a:spcBef>
-                          <a:spcPts val="0"/>
-                        </a:spcBef>
-                        <a:spcAft>
-                          <a:spcPts val="0"/>
-                        </a:spcAft>
-                      </a:pPr>
-                      <a:r>
-                        <a:rPr sz="1300" b="0">
-                          <a:solidFill>
-                            <a:srgbClr val="1F1F1F"/>
-                          </a:solidFill>
-                          <a:latin typeface="Calibri"/>
-                        </a:rPr>
-                        <a:t>mezanino e júnior;</a:t>
-                      </a:r>
-                    </a:p>
-                    <a:p>
-                      <a:pPr algn="ctr">
-                        <a:lnSpc>
-                          <a:spcPct val="100000"/>
-                        </a:lnSpc>
-                        <a:spcBef>
-                          <a:spcPts val="0"/>
-                        </a:spcBef>
-                        <a:spcAft>
-                          <a:spcPts val="0"/>
-                        </a:spcAft>
-                      </a:pPr>
-                      <a:r>
-                        <a:rPr sz="1300" b="0">
-                          <a:solidFill>
-                            <a:srgbClr val="1F1F1F"/>
-                          </a:solidFill>
-                          <a:latin typeface="Calibri"/>
-                        </a:rPr>
-                        <a:t>termos finais por série</a:t>
-                      </a:r>
-                    </a:p>
-                    <a:p>
-                      <a:pPr algn="ctr">
-                        <a:lnSpc>
-                          <a:spcPct val="100000"/>
-                        </a:lnSpc>
-                        <a:spcBef>
-                          <a:spcPts val="0"/>
-                        </a:spcBef>
-                        <a:spcAft>
-                          <a:spcPts val="0"/>
-                        </a:spcAft>
-                      </a:pPr>
-                      <a:r>
-                        <a:rPr sz="1300" b="0">
-                          <a:solidFill>
-                            <a:srgbClr val="1F1F1F"/>
-                          </a:solidFill>
-                          <a:latin typeface="Calibri"/>
-                        </a:rPr>
-                        <a:t>devem ser confirmados</a:t>
-                      </a:r>
-                    </a:p>
-                    <a:p>
-                      <a:pPr algn="ctr">
-                        <a:lnSpc>
-                          <a:spcPct val="100000"/>
-                        </a:lnSpc>
-                        <a:spcBef>
-                          <a:spcPts val="0"/>
-                        </a:spcBef>
-                        <a:spcAft>
-                          <a:spcPts val="0"/>
-                        </a:spcAft>
-                      </a:pPr>
-                      <a:r>
-                        <a:rPr sz="1300" b="0">
-                          <a:solidFill>
-                            <a:srgbClr val="1F1F1F"/>
-                          </a:solidFill>
-                          <a:latin typeface="Calibri"/>
-                        </a:rPr>
-                        <a:t>em apêndices.</a:t>
-                      </a:r>
-                    </a:p>
-                  </a:txBody>
-                  <a:tcPr marL="91440" marR="91440" marT="41148" marB="41148" anchor="ctr">
-                    <a:solidFill>
-                      <a:srgbClr val="FFFFFF"/>
-                    </a:solidFill>
-                    <a:lnL>
-                      <a:noFill/>
-                    </a:lnL>
-                    <a:lnR>
-                      <a:noFill/>
-                    </a:lnR>
-                    <a:lnT>
-                      <a:noFill/>
-                    </a:lnT>
-                    <a:lnB>
-                      <a:noFill/>
-                    </a:lnB>
-                  </a:tcPr>
-                </a:tc>
-                <a:tc>
-                  <a:txBody>
-                    <a:bodyPr wrap="square">
-                      <a:noAutofit/>
-                    </a:bodyPr>
-                    <a:lstStyle/>
-                    <a:p>
-                      <a:pPr algn="ctr">
-                        <a:lnSpc>
-                          <a:spcPct val="100000"/>
-                        </a:lnSpc>
-                        <a:spcBef>
-                          <a:spcPts val="0"/>
-                        </a:spcBef>
-                        <a:spcAft>
-                          <a:spcPts val="0"/>
-                        </a:spcAft>
-                      </a:pPr>
-                      <a:r>
-                        <a:rPr sz="1300" b="0">
-                          <a:solidFill>
-                            <a:srgbClr val="1F1F1F"/>
-                          </a:solidFill>
-                          <a:latin typeface="Calibri"/>
-                        </a:rPr>
-                        <a:t>Sênior, subordinadas</a:t>
-                      </a:r>
-                    </a:p>
-                    <a:p>
-                      <a:pPr algn="ctr">
-                        <a:lnSpc>
-                          <a:spcPct val="100000"/>
-                        </a:lnSpc>
-                        <a:spcBef>
-                          <a:spcPts val="0"/>
-                        </a:spcBef>
-                        <a:spcAft>
-                          <a:spcPts val="0"/>
-                        </a:spcAft>
-                      </a:pPr>
-                      <a:r>
-                        <a:rPr sz="1300" b="0">
-                          <a:solidFill>
-                            <a:srgbClr val="1F1F1F"/>
-                          </a:solidFill>
-                          <a:latin typeface="Calibri"/>
-                        </a:rPr>
-                        <a:t>mezanino e júnior;</a:t>
-                      </a:r>
-                    </a:p>
-                    <a:p>
-                      <a:pPr algn="ctr">
-                        <a:lnSpc>
-                          <a:spcPct val="100000"/>
-                        </a:lnSpc>
-                        <a:spcBef>
-                          <a:spcPts val="0"/>
-                        </a:spcBef>
-                        <a:spcAft>
-                          <a:spcPts val="0"/>
-                        </a:spcAft>
-                      </a:pPr>
-                      <a:r>
-                        <a:rPr sz="1300" b="0">
-                          <a:solidFill>
-                            <a:srgbClr val="1F1F1F"/>
-                          </a:solidFill>
-                          <a:latin typeface="Calibri"/>
-                        </a:rPr>
-                        <a:t>termos finais por série</a:t>
-                      </a:r>
-                    </a:p>
-                    <a:p>
-                      <a:pPr algn="ctr">
-                        <a:lnSpc>
-                          <a:spcPct val="100000"/>
-                        </a:lnSpc>
-                        <a:spcBef>
-                          <a:spcPts val="0"/>
-                        </a:spcBef>
-                        <a:spcAft>
-                          <a:spcPts val="0"/>
-                        </a:spcAft>
-                      </a:pPr>
-                      <a:r>
-                        <a:rPr sz="1300" b="0">
-                          <a:solidFill>
-                            <a:srgbClr val="1F1F1F"/>
-                          </a:solidFill>
-                          <a:latin typeface="Calibri"/>
-                        </a:rPr>
-                        <a:t>devem ser confirmados</a:t>
-                      </a:r>
-                    </a:p>
-                    <a:p>
-                      <a:pPr algn="ctr">
-                        <a:lnSpc>
-                          <a:spcPct val="100000"/>
-                        </a:lnSpc>
-                        <a:spcBef>
-                          <a:spcPts val="0"/>
-                        </a:spcBef>
-                        <a:spcAft>
-                          <a:spcPts val="0"/>
-                        </a:spcAft>
-                      </a:pPr>
-                      <a:r>
-                        <a:rPr sz="1300" b="0">
-                          <a:solidFill>
-                            <a:srgbClr val="1F1F1F"/>
-                          </a:solidFill>
-                          <a:latin typeface="Calibri"/>
-                        </a:rPr>
-                        <a:t>em apêndices.</a:t>
-                      </a:r>
-                    </a:p>
-                  </a:txBody>
-                  <a:tcPr marL="91440" marR="91440" marT="41148" marB="41148" anchor="ctr">
-                    <a:solidFill>
-                      <a:srgbClr val="FFFFFF"/>
-                    </a:solidFill>
-                    <a:lnL>
-                      <a:noFill/>
-                    </a:lnL>
-                    <a:lnR>
-                      <a:noFill/>
-                    </a:lnR>
-                    <a:lnT>
-                      <a:noFill/>
-                    </a:lnT>
-                    <a:lnB>
-                      <a:noFill/>
-                    </a:lnB>
-                  </a:tcPr>
-                </a:tc>
-                <a:tc>
-                  <a:txBody>
-                    <a:bodyPr wrap="square">
-                      <a:noAutofit/>
-                    </a:bodyPr>
-                    <a:lstStyle/>
-                    <a:p>
-                      <a:pPr algn="ctr">
-                        <a:lnSpc>
-                          <a:spcPct val="100000"/>
-                        </a:lnSpc>
-                        <a:spcBef>
-                          <a:spcPts val="0"/>
-                        </a:spcBef>
-                        <a:spcAft>
-                          <a:spcPts val="0"/>
-                        </a:spcAft>
-                      </a:pPr>
-                      <a:r>
-                        <a:rPr sz="1300" b="0">
-                          <a:solidFill>
-                            <a:srgbClr val="1F1F1F"/>
-                          </a:solidFill>
-                          <a:latin typeface="Calibri"/>
-                        </a:rPr>
-                        <a:t>4ª sênior e 3ª mezanino</a:t>
-                      </a:r>
-                    </a:p>
-                    <a:p>
-                      <a:pPr algn="ctr">
-                        <a:lnSpc>
-                          <a:spcPct val="100000"/>
-                        </a:lnSpc>
-                        <a:spcBef>
-                          <a:spcPts val="0"/>
-                        </a:spcBef>
-                        <a:spcAft>
-                          <a:spcPts val="0"/>
-                        </a:spcAft>
-                      </a:pPr>
-                      <a:r>
-                        <a:rPr sz="1300" b="0">
-                          <a:solidFill>
-                            <a:srgbClr val="1F1F1F"/>
-                          </a:solidFill>
-                          <a:latin typeface="Calibri"/>
-                        </a:rPr>
-                        <a:t>com apêndices</a:t>
-                      </a:r>
-                    </a:p>
-                    <a:p>
-                      <a:pPr algn="ctr">
-                        <a:lnSpc>
-                          <a:spcPct val="100000"/>
-                        </a:lnSpc>
-                        <a:spcBef>
-                          <a:spcPts val="0"/>
-                        </a:spcBef>
-                        <a:spcAft>
-                          <a:spcPts val="0"/>
-                        </a:spcAft>
-                      </a:pPr>
-                      <a:r>
-                        <a:rPr sz="1300" b="0">
-                          <a:solidFill>
-                            <a:srgbClr val="1F1F1F"/>
-                          </a:solidFill>
-                          <a:latin typeface="Calibri"/>
-                        </a:rPr>
-                        <a:t>preenchidos; demais</a:t>
-                      </a:r>
-                    </a:p>
-                    <a:p>
-                      <a:pPr algn="ctr">
-                        <a:lnSpc>
-                          <a:spcPct val="100000"/>
-                        </a:lnSpc>
-                        <a:spcBef>
-                          <a:spcPts val="0"/>
-                        </a:spcBef>
-                        <a:spcAft>
-                          <a:spcPts val="0"/>
-                        </a:spcAft>
-                      </a:pPr>
-                      <a:r>
-                        <a:rPr sz="1300" b="0">
-                          <a:solidFill>
-                            <a:srgbClr val="1F1F1F"/>
-                          </a:solidFill>
-                          <a:latin typeface="Calibri"/>
-                        </a:rPr>
-                        <a:t>termos de séries</a:t>
-                      </a:r>
-                    </a:p>
-                    <a:p>
-                      <a:pPr algn="ctr">
-                        <a:lnSpc>
-                          <a:spcPct val="100000"/>
-                        </a:lnSpc>
-                        <a:spcBef>
-                          <a:spcPts val="0"/>
-                        </a:spcBef>
-                        <a:spcAft>
-                          <a:spcPts val="0"/>
-                        </a:spcAft>
-                      </a:pPr>
-                      <a:r>
-                        <a:rPr sz="1300" b="0">
-                          <a:solidFill>
-                            <a:srgbClr val="1F1F1F"/>
-                          </a:solidFill>
-                          <a:latin typeface="Calibri"/>
-                        </a:rPr>
-                        <a:t>anteriores não</a:t>
-                      </a:r>
-                    </a:p>
-                    <a:p>
-                      <a:pPr algn="ctr">
-                        <a:lnSpc>
-                          <a:spcPct val="100000"/>
-                        </a:lnSpc>
-                        <a:spcBef>
-                          <a:spcPts val="0"/>
-                        </a:spcBef>
-                        <a:spcAft>
-                          <a:spcPts val="0"/>
-                        </a:spcAft>
-                      </a:pPr>
-                      <a:r>
-                        <a:rPr sz="1300" b="0">
-                          <a:solidFill>
-                            <a:srgbClr val="1F1F1F"/>
-                          </a:solidFill>
-                          <a:latin typeface="Calibri"/>
-                        </a:rPr>
-                        <a:t>confirmados.</a:t>
-                      </a:r>
-                    </a:p>
-                  </a:txBody>
-                  <a:tcPr marL="91440" marR="91440" marT="41148" marB="41148" anchor="ctr">
-                    <a:solidFill>
-                      <a:srgbClr val="FFFFFF"/>
-                    </a:solidFill>
-                    <a:lnL>
-                      <a:noFill/>
-                    </a:lnL>
-                    <a:lnR>
-                      <a:noFill/>
-                    </a:lnR>
-                    <a:lnT>
-                      <a:noFill/>
-                    </a:lnT>
-                    <a:lnB>
-                      <a:noFill/>
-                    </a:lnB>
-                  </a:tcPr>
-                </a:tc>
-              </a:tr>
-              <a:tr h="1220724">
-                <a:tc>
-                  <a:txBody>
-                    <a:bodyPr wrap="square">
-                      <a:noAutofit/>
-                    </a:bodyPr>
-                    <a:lstStyle/>
-                    <a:p>
-                      <a:pPr algn="l">
-                        <a:lnSpc>
-                          <a:spcPct val="100000"/>
-                        </a:lnSpc>
-                        <a:spcBef>
-                          <a:spcPts val="0"/>
-                        </a:spcBef>
-                        <a:spcAft>
-                          <a:spcPts val="0"/>
-                        </a:spcAft>
-                      </a:pPr>
-                      <a:r>
-                        <a:rPr sz="1300" b="1">
-                          <a:solidFill>
-                            <a:srgbClr val="1F1F1F"/>
-                          </a:solidFill>
-                          <a:latin typeface="Calibri"/>
-                        </a:rPr>
-                        <a:t>Remuneração</a:t>
-                      </a:r>
-                    </a:p>
-                  </a:txBody>
-                  <a:tcPr marL="91440" marR="91440" marT="41148" marB="41148" anchor="ctr">
-                    <a:solidFill>
-                      <a:srgbClr val="FFFFFF"/>
-                    </a:solidFill>
-                    <a:lnL>
-                      <a:noFill/>
-                    </a:lnL>
-                    <a:lnR>
-                      <a:noFill/>
-                    </a:lnR>
-                    <a:lnT>
-                      <a:noFill/>
-                    </a:lnT>
-                    <a:lnB>
-                      <a:noFill/>
-                    </a:lnB>
-                  </a:tcPr>
-                </a:tc>
-                <a:tc>
-                  <a:txBody>
-                    <a:bodyPr wrap="square">
-                      <a:noAutofit/>
-                    </a:bodyPr>
-                    <a:lstStyle/>
-                    <a:p>
-                      <a:pPr algn="ctr">
-                        <a:lnSpc>
-                          <a:spcPct val="100000"/>
-                        </a:lnSpc>
-                        <a:spcBef>
-                          <a:spcPts val="0"/>
-                        </a:spcBef>
-                        <a:spcAft>
-                          <a:spcPts val="0"/>
-                        </a:spcAft>
-                      </a:pPr>
-                      <a:r>
-                        <a:rPr sz="1300" b="0">
-                          <a:solidFill>
-                            <a:srgbClr val="1F1F1F"/>
-                          </a:solidFill>
-                          <a:latin typeface="Calibri"/>
-                        </a:rPr>
-                        <a:t>Spread final não</a:t>
-                      </a:r>
-                    </a:p>
-                    <a:p>
-                      <a:pPr algn="ctr">
-                        <a:lnSpc>
-                          <a:spcPct val="100000"/>
-                        </a:lnSpc>
-                        <a:spcBef>
-                          <a:spcPts val="0"/>
-                        </a:spcBef>
-                        <a:spcAft>
-                          <a:spcPts val="0"/>
-                        </a:spcAft>
-                      </a:pPr>
-                      <a:r>
-                        <a:rPr sz="1300" b="0">
-                          <a:solidFill>
-                            <a:srgbClr val="1F1F1F"/>
-                          </a:solidFill>
-                          <a:latin typeface="Calibri"/>
-                        </a:rPr>
-                        <a:t>localizado no texto</a:t>
-                      </a:r>
-                    </a:p>
-                    <a:p>
-                      <a:pPr algn="ctr">
-                        <a:lnSpc>
-                          <a:spcPct val="100000"/>
-                        </a:lnSpc>
-                        <a:spcBef>
-                          <a:spcPts val="0"/>
-                        </a:spcBef>
-                        <a:spcAft>
-                          <a:spcPts val="0"/>
-                        </a:spcAft>
-                      </a:pPr>
-                      <a:r>
-                        <a:rPr sz="1300" b="0">
-                          <a:solidFill>
-                            <a:srgbClr val="1F1F1F"/>
-                          </a:solidFill>
-                          <a:latin typeface="Calibri"/>
-                        </a:rPr>
-                        <a:t>disponível, salvo</a:t>
-                      </a:r>
-                    </a:p>
-                    <a:p>
-                      <a:pPr algn="ctr">
-                        <a:lnSpc>
-                          <a:spcPct val="100000"/>
-                        </a:lnSpc>
-                        <a:spcBef>
-                          <a:spcPts val="0"/>
-                        </a:spcBef>
-                        <a:spcAft>
-                          <a:spcPts val="0"/>
-                        </a:spcAft>
-                      </a:pPr>
-                      <a:r>
-                        <a:rPr sz="1300" b="0">
-                          <a:solidFill>
-                            <a:srgbClr val="1F1F1F"/>
-                          </a:solidFill>
-                          <a:latin typeface="Calibri"/>
-                        </a:rPr>
-                        <a:t>apêndices III</a:t>
-                      </a:r>
-                    </a:p>
-                    <a:p>
-                      <a:pPr algn="ctr">
-                        <a:lnSpc>
-                          <a:spcPct val="100000"/>
-                        </a:lnSpc>
-                        <a:spcBef>
-                          <a:spcPts val="0"/>
-                        </a:spcBef>
-                        <a:spcAft>
-                          <a:spcPts val="0"/>
-                        </a:spcAft>
-                      </a:pPr>
-                      <a:r>
-                        <a:rPr sz="1300" b="0">
-                          <a:solidFill>
-                            <a:srgbClr val="1F1F1F"/>
-                          </a:solidFill>
-                          <a:latin typeface="Calibri"/>
-                        </a:rPr>
-                        <a:t>identificados nesta</a:t>
-                      </a:r>
-                    </a:p>
-                    <a:p>
-                      <a:pPr algn="ctr">
-                        <a:lnSpc>
-                          <a:spcPct val="100000"/>
-                        </a:lnSpc>
-                        <a:spcBef>
-                          <a:spcPts val="0"/>
-                        </a:spcBef>
-                        <a:spcAft>
-                          <a:spcPts val="0"/>
-                        </a:spcAft>
-                      </a:pPr>
-                      <a:r>
-                        <a:rPr sz="1300" b="0">
-                          <a:solidFill>
-                            <a:srgbClr val="1F1F1F"/>
-                          </a:solidFill>
-                          <a:latin typeface="Calibri"/>
-                        </a:rPr>
-                        <a:t>revisão.</a:t>
-                      </a:r>
-                    </a:p>
-                  </a:txBody>
-                  <a:tcPr marL="91440" marR="91440" marT="41148" marB="41148" anchor="ctr">
-                    <a:solidFill>
-                      <a:srgbClr val="FFFFFF"/>
-                    </a:solidFill>
-                    <a:lnL>
-                      <a:noFill/>
-                    </a:lnL>
-                    <a:lnR>
-                      <a:noFill/>
-                    </a:lnR>
-                    <a:lnT>
-                      <a:noFill/>
-                    </a:lnT>
-                    <a:lnB>
-                      <a:noFill/>
-                    </a:lnB>
-                  </a:tcPr>
-                </a:tc>
-                <a:tc>
-                  <a:txBody>
-                    <a:bodyPr wrap="square">
-                      <a:noAutofit/>
-                    </a:bodyPr>
-                    <a:lstStyle/>
-                    <a:p>
-                      <a:pPr algn="ctr">
-                        <a:lnSpc>
-                          <a:spcPct val="100000"/>
-                        </a:lnSpc>
-                        <a:spcBef>
-                          <a:spcPts val="0"/>
-                        </a:spcBef>
-                        <a:spcAft>
-                          <a:spcPts val="0"/>
-                        </a:spcAft>
-                      </a:pPr>
-                      <a:r>
-                        <a:rPr sz="1300" b="0">
-                          <a:solidFill>
-                            <a:srgbClr val="1F1F1F"/>
-                          </a:solidFill>
-                          <a:latin typeface="Calibri"/>
-                        </a:rPr>
-                        <a:t>Spread final não</a:t>
-                      </a:r>
-                    </a:p>
-                    <a:p>
-                      <a:pPr algn="ctr">
-                        <a:lnSpc>
-                          <a:spcPct val="100000"/>
-                        </a:lnSpc>
-                        <a:spcBef>
-                          <a:spcPts val="0"/>
-                        </a:spcBef>
-                        <a:spcAft>
-                          <a:spcPts val="0"/>
-                        </a:spcAft>
-                      </a:pPr>
-                      <a:r>
-                        <a:rPr sz="1300" b="0">
-                          <a:solidFill>
-                            <a:srgbClr val="1F1F1F"/>
-                          </a:solidFill>
-                          <a:latin typeface="Calibri"/>
-                        </a:rPr>
-                        <a:t>localizado no texto</a:t>
-                      </a:r>
-                    </a:p>
-                    <a:p>
-                      <a:pPr algn="ctr">
-                        <a:lnSpc>
-                          <a:spcPct val="100000"/>
-                        </a:lnSpc>
-                        <a:spcBef>
-                          <a:spcPts val="0"/>
-                        </a:spcBef>
-                        <a:spcAft>
-                          <a:spcPts val="0"/>
-                        </a:spcAft>
-                      </a:pPr>
-                      <a:r>
-                        <a:rPr sz="1300" b="0">
-                          <a:solidFill>
-                            <a:srgbClr val="1F1F1F"/>
-                          </a:solidFill>
-                          <a:latin typeface="Calibri"/>
-                        </a:rPr>
-                        <a:t>disponível, salvo</a:t>
-                      </a:r>
-                    </a:p>
-                    <a:p>
-                      <a:pPr algn="ctr">
-                        <a:lnSpc>
-                          <a:spcPct val="100000"/>
-                        </a:lnSpc>
-                        <a:spcBef>
-                          <a:spcPts val="0"/>
-                        </a:spcBef>
-                        <a:spcAft>
-                          <a:spcPts val="0"/>
-                        </a:spcAft>
-                      </a:pPr>
-                      <a:r>
-                        <a:rPr sz="1300" b="0">
-                          <a:solidFill>
-                            <a:srgbClr val="1F1F1F"/>
-                          </a:solidFill>
-                          <a:latin typeface="Calibri"/>
-                        </a:rPr>
-                        <a:t>apêndices III</a:t>
-                      </a:r>
-                    </a:p>
-                    <a:p>
-                      <a:pPr algn="ctr">
-                        <a:lnSpc>
-                          <a:spcPct val="100000"/>
-                        </a:lnSpc>
-                        <a:spcBef>
-                          <a:spcPts val="0"/>
-                        </a:spcBef>
-                        <a:spcAft>
-                          <a:spcPts val="0"/>
-                        </a:spcAft>
-                      </a:pPr>
-                      <a:r>
-                        <a:rPr sz="1300" b="0">
-                          <a:solidFill>
-                            <a:srgbClr val="1F1F1F"/>
-                          </a:solidFill>
-                          <a:latin typeface="Calibri"/>
-                        </a:rPr>
-                        <a:t>identificados nesta</a:t>
-                      </a:r>
-                    </a:p>
-                    <a:p>
-                      <a:pPr algn="ctr">
-                        <a:lnSpc>
-                          <a:spcPct val="100000"/>
-                        </a:lnSpc>
-                        <a:spcBef>
-                          <a:spcPts val="0"/>
-                        </a:spcBef>
-                        <a:spcAft>
-                          <a:spcPts val="0"/>
-                        </a:spcAft>
-                      </a:pPr>
-                      <a:r>
-                        <a:rPr sz="1300" b="0">
-                          <a:solidFill>
-                            <a:srgbClr val="1F1F1F"/>
-                          </a:solidFill>
-                          <a:latin typeface="Calibri"/>
-                        </a:rPr>
-                        <a:t>revisão.</a:t>
-                      </a:r>
-                    </a:p>
-                  </a:txBody>
-                  <a:tcPr marL="91440" marR="91440" marT="41148" marB="41148" anchor="ctr">
-                    <a:solidFill>
-                      <a:srgbClr val="FFFFFF"/>
-                    </a:solidFill>
-                    <a:lnL>
-                      <a:noFill/>
-                    </a:lnL>
-                    <a:lnR>
-                      <a:noFill/>
-                    </a:lnR>
-                    <a:lnT>
-                      <a:noFill/>
-                    </a:lnT>
-                    <a:lnB>
-                      <a:noFill/>
-                    </a:lnB>
-                  </a:tcPr>
-                </a:tc>
-                <a:tc>
-                  <a:txBody>
-                    <a:bodyPr wrap="square">
-                      <a:noAutofit/>
-                    </a:bodyPr>
-                    <a:lstStyle/>
-                    <a:p>
-                      <a:pPr algn="ctr">
-                        <a:lnSpc>
-                          <a:spcPct val="100000"/>
-                        </a:lnSpc>
-                        <a:spcBef>
-                          <a:spcPts val="0"/>
-                        </a:spcBef>
-                        <a:spcAft>
-                          <a:spcPts val="0"/>
-                        </a:spcAft>
-                      </a:pPr>
-                      <a:r>
-                        <a:rPr sz="1300" b="0">
-                          <a:solidFill>
-                            <a:srgbClr val="1F1F1F"/>
-                          </a:solidFill>
-                          <a:latin typeface="Calibri"/>
-                        </a:rPr>
-                        <a:t>Spread final não</a:t>
-                      </a:r>
-                    </a:p>
-                    <a:p>
-                      <a:pPr algn="ctr">
-                        <a:lnSpc>
-                          <a:spcPct val="100000"/>
-                        </a:lnSpc>
-                        <a:spcBef>
-                          <a:spcPts val="0"/>
-                        </a:spcBef>
-                        <a:spcAft>
-                          <a:spcPts val="0"/>
-                        </a:spcAft>
-                      </a:pPr>
-                      <a:r>
-                        <a:rPr sz="1300" b="0">
-                          <a:solidFill>
-                            <a:srgbClr val="1F1F1F"/>
-                          </a:solidFill>
-                          <a:latin typeface="Calibri"/>
-                        </a:rPr>
-                        <a:t>localizado no texto</a:t>
-                      </a:r>
-                    </a:p>
-                    <a:p>
-                      <a:pPr algn="ctr">
-                        <a:lnSpc>
-                          <a:spcPct val="100000"/>
-                        </a:lnSpc>
-                        <a:spcBef>
-                          <a:spcPts val="0"/>
-                        </a:spcBef>
-                        <a:spcAft>
-                          <a:spcPts val="0"/>
-                        </a:spcAft>
-                      </a:pPr>
-                      <a:r>
-                        <a:rPr sz="1300" b="0">
-                          <a:solidFill>
-                            <a:srgbClr val="1F1F1F"/>
-                          </a:solidFill>
-                          <a:latin typeface="Calibri"/>
-                        </a:rPr>
-                        <a:t>disponível, salvo</a:t>
-                      </a:r>
-                    </a:p>
-                    <a:p>
-                      <a:pPr algn="ctr">
-                        <a:lnSpc>
-                          <a:spcPct val="100000"/>
-                        </a:lnSpc>
-                        <a:spcBef>
-                          <a:spcPts val="0"/>
-                        </a:spcBef>
-                        <a:spcAft>
-                          <a:spcPts val="0"/>
-                        </a:spcAft>
-                      </a:pPr>
-                      <a:r>
-                        <a:rPr sz="1300" b="0">
-                          <a:solidFill>
-                            <a:srgbClr val="1F1F1F"/>
-                          </a:solidFill>
-                          <a:latin typeface="Calibri"/>
-                        </a:rPr>
-                        <a:t>apêndices III</a:t>
-                      </a:r>
-                    </a:p>
-                    <a:p>
-                      <a:pPr algn="ctr">
-                        <a:lnSpc>
-                          <a:spcPct val="100000"/>
-                        </a:lnSpc>
-                        <a:spcBef>
-                          <a:spcPts val="0"/>
-                        </a:spcBef>
-                        <a:spcAft>
-                          <a:spcPts val="0"/>
-                        </a:spcAft>
-                      </a:pPr>
-                      <a:r>
-                        <a:rPr sz="1300" b="0">
-                          <a:solidFill>
-                            <a:srgbClr val="1F1F1F"/>
-                          </a:solidFill>
-                          <a:latin typeface="Calibri"/>
-                        </a:rPr>
-                        <a:t>identificados nesta</a:t>
-                      </a:r>
-                    </a:p>
-                    <a:p>
-                      <a:pPr algn="ctr">
-                        <a:lnSpc>
-                          <a:spcPct val="100000"/>
-                        </a:lnSpc>
-                        <a:spcBef>
-                          <a:spcPts val="0"/>
-                        </a:spcBef>
-                        <a:spcAft>
-                          <a:spcPts val="0"/>
-                        </a:spcAft>
-                      </a:pPr>
-                      <a:r>
-                        <a:rPr sz="1300" b="0">
-                          <a:solidFill>
-                            <a:srgbClr val="1F1F1F"/>
-                          </a:solidFill>
-                          <a:latin typeface="Calibri"/>
-                        </a:rPr>
-                        <a:t>revisão.</a:t>
-                      </a:r>
-                    </a:p>
-                  </a:txBody>
-                  <a:tcPr marL="91440" marR="91440" marT="41148" marB="41148" anchor="ctr">
-                    <a:solidFill>
-                      <a:srgbClr val="FFFFFF"/>
-                    </a:solidFill>
-                    <a:lnL>
-                      <a:noFill/>
-                    </a:lnL>
-                    <a:lnR>
-                      <a:noFill/>
-                    </a:lnR>
-                    <a:lnT>
-                      <a:noFill/>
-                    </a:lnT>
-                    <a:lnB>
-                      <a:noFill/>
-                    </a:lnB>
-                  </a:tcPr>
-                </a:tc>
-                <a:tc>
-                  <a:txBody>
-                    <a:bodyPr wrap="square">
-                      <a:noAutofit/>
-                    </a:bodyPr>
-                    <a:lstStyle/>
-                    <a:p>
-                      <a:pPr algn="ctr">
-                        <a:lnSpc>
-                          <a:spcPct val="100000"/>
-                        </a:lnSpc>
-                        <a:spcBef>
-                          <a:spcPts val="0"/>
-                        </a:spcBef>
-                        <a:spcAft>
-                          <a:spcPts val="0"/>
-                        </a:spcAft>
-                      </a:pPr>
-                      <a:r>
-                        <a:rPr sz="1300" b="0">
-                          <a:solidFill>
-                            <a:srgbClr val="1F1F1F"/>
-                          </a:solidFill>
-                          <a:latin typeface="Calibri"/>
-                        </a:rPr>
-                        <a:t>4ª sênior DI + 1,50%</a:t>
-                      </a:r>
-                    </a:p>
-                    <a:p>
-                      <a:pPr algn="ctr">
-                        <a:lnSpc>
-                          <a:spcPct val="100000"/>
-                        </a:lnSpc>
-                        <a:spcBef>
-                          <a:spcPts val="0"/>
-                        </a:spcBef>
-                        <a:spcAft>
-                          <a:spcPts val="0"/>
-                        </a:spcAft>
-                      </a:pPr>
-                      <a:r>
-                        <a:rPr sz="1300" b="0">
-                          <a:solidFill>
-                            <a:srgbClr val="1F1F1F"/>
-                          </a:solidFill>
-                          <a:latin typeface="Calibri"/>
-                        </a:rPr>
-                        <a:t>a.a.; 3ª mezanino DI +</a:t>
-                      </a:r>
-                    </a:p>
-                    <a:p>
-                      <a:pPr algn="ctr">
-                        <a:lnSpc>
-                          <a:spcPct val="100000"/>
-                        </a:lnSpc>
-                        <a:spcBef>
-                          <a:spcPts val="0"/>
-                        </a:spcBef>
-                        <a:spcAft>
-                          <a:spcPts val="0"/>
-                        </a:spcAft>
-                      </a:pPr>
-                      <a:r>
-                        <a:rPr sz="1300" b="0">
-                          <a:solidFill>
-                            <a:srgbClr val="1F1F1F"/>
-                          </a:solidFill>
-                          <a:latin typeface="Calibri"/>
-                        </a:rPr>
-                        <a:t>2,70% a.a.</a:t>
-                      </a:r>
-                    </a:p>
-                  </a:txBody>
-                  <a:tcPr marL="91440" marR="91440" marT="41148" marB="41148" anchor="ctr">
-                    <a:solidFill>
-                      <a:srgbClr val="FFFFFF"/>
-                    </a:solidFill>
-                    <a:lnL>
-                      <a:noFill/>
-                    </a:lnL>
-                    <a:lnR>
-                      <a:noFill/>
-                    </a:lnR>
-                    <a:lnT>
-                      <a:noFill/>
-                    </a:lnT>
-                    <a:lnB>
-                      <a:noFill/>
                     </a:lnB>
                   </a:tcPr>
                 </a:tc>
@@ -23182,7 +21410,7 @@
                           </a:solidFill>
                           <a:latin typeface="Calibri"/>
                         </a:rPr>
-                        <a:t>Volume/VNU</a:t>
+                        <a:t>Classes/séries</a:t>
                       </a:r>
                     </a:p>
                   </a:txBody>
@@ -23229,51 +21457,29 @@
                           </a:solidFill>
                           <a:latin typeface="Calibri"/>
                         </a:rPr>
-                        <a:t>Volume por série não</a:t>
-                      </a:r>
-                    </a:p>
-                    <a:p>
-                      <a:pPr algn="ctr">
-                        <a:lnSpc>
-                          <a:spcPct val="100000"/>
-                        </a:lnSpc>
-                        <a:spcBef>
-                          <a:spcPts val="0"/>
-                        </a:spcBef>
-                        <a:spcAft>
-                          <a:spcPts val="0"/>
-                        </a:spcAft>
-                      </a:pPr>
-                      <a:r>
-                        <a:rPr sz="1300" b="0">
-                          <a:solidFill>
-                            <a:srgbClr val="1F1F1F"/>
-                          </a:solidFill>
-                          <a:latin typeface="Calibri"/>
-                        </a:rPr>
-                        <a:t>confirmado; VNU geral</a:t>
-                      </a:r>
-                    </a:p>
-                    <a:p>
-                      <a:pPr algn="ctr">
-                        <a:lnSpc>
-                          <a:spcPct val="100000"/>
-                        </a:lnSpc>
-                        <a:spcBef>
-                          <a:spcPts val="0"/>
-                        </a:spcBef>
-                        <a:spcAft>
-                          <a:spcPts val="0"/>
-                        </a:spcAft>
-                      </a:pPr>
-                      <a:r>
-                        <a:rPr sz="1300" b="0">
-                          <a:solidFill>
-                            <a:srgbClr val="1F1F1F"/>
-                          </a:solidFill>
-                          <a:latin typeface="Calibri"/>
-                        </a:rPr>
-                        <a:t>R$ 1,00.</a:t>
+                        <a:t>Sênior, subordinadas</a:t>
+                      </a:r>
+                    </a:p>
+                    <a:p>
+                      <a:pPr algn="ctr">
+                        <a:lnSpc>
+                          <a:spcPct val="100000"/>
+                        </a:lnSpc>
+                        <a:spcBef>
+                          <a:spcPts val="0"/>
+                        </a:spcBef>
+                        <a:spcAft>
+                          <a:spcPts val="0"/>
+                        </a:spcAft>
+                      </a:pPr>
+                      <a:r>
+                        <a:rPr sz="1300" b="0">
+                          <a:solidFill>
+                            <a:srgbClr val="1F1F1F"/>
+                          </a:solidFill>
+                          <a:latin typeface="Calibri"/>
+                        </a:rPr>
+                        <a:t>mezanino e júnior</a:t>
                       </a:r>
                     </a:p>
                   </a:txBody>
@@ -23320,51 +21526,29 @@
                           </a:solidFill>
                           <a:latin typeface="Calibri"/>
                         </a:rPr>
-                        <a:t>Volume por série não</a:t>
-                      </a:r>
-                    </a:p>
-                    <a:p>
-                      <a:pPr algn="ctr">
-                        <a:lnSpc>
-                          <a:spcPct val="100000"/>
-                        </a:lnSpc>
-                        <a:spcBef>
-                          <a:spcPts val="0"/>
-                        </a:spcBef>
-                        <a:spcAft>
-                          <a:spcPts val="0"/>
-                        </a:spcAft>
-                      </a:pPr>
-                      <a:r>
-                        <a:rPr sz="1300" b="0">
-                          <a:solidFill>
-                            <a:srgbClr val="1F1F1F"/>
-                          </a:solidFill>
-                          <a:latin typeface="Calibri"/>
-                        </a:rPr>
-                        <a:t>confirmado; VNU geral</a:t>
-                      </a:r>
-                    </a:p>
-                    <a:p>
-                      <a:pPr algn="ctr">
-                        <a:lnSpc>
-                          <a:spcPct val="100000"/>
-                        </a:lnSpc>
-                        <a:spcBef>
-                          <a:spcPts val="0"/>
-                        </a:spcBef>
-                        <a:spcAft>
-                          <a:spcPts val="0"/>
-                        </a:spcAft>
-                      </a:pPr>
-                      <a:r>
-                        <a:rPr sz="1300" b="0">
-                          <a:solidFill>
-                            <a:srgbClr val="1F1F1F"/>
-                          </a:solidFill>
-                          <a:latin typeface="Calibri"/>
-                        </a:rPr>
-                        <a:t>R$ 1.000,00.</a:t>
+                        <a:t>Sênior, subordinadas</a:t>
+                      </a:r>
+                    </a:p>
+                    <a:p>
+                      <a:pPr algn="ctr">
+                        <a:lnSpc>
+                          <a:spcPct val="100000"/>
+                        </a:lnSpc>
+                        <a:spcBef>
+                          <a:spcPts val="0"/>
+                        </a:spcBef>
+                        <a:spcAft>
+                          <a:spcPts val="0"/>
+                        </a:spcAft>
+                      </a:pPr>
+                      <a:r>
+                        <a:rPr sz="1300" b="0">
+                          <a:solidFill>
+                            <a:srgbClr val="1F1F1F"/>
+                          </a:solidFill>
+                          <a:latin typeface="Calibri"/>
+                        </a:rPr>
+                        <a:t>mezanino e júnior</a:t>
                       </a:r>
                     </a:p>
                   </a:txBody>
@@ -23411,51 +21595,29 @@
                           </a:solidFill>
                           <a:latin typeface="Calibri"/>
                         </a:rPr>
-                        <a:t>Volume por série não</a:t>
-                      </a:r>
-                    </a:p>
-                    <a:p>
-                      <a:pPr algn="ctr">
-                        <a:lnSpc>
-                          <a:spcPct val="100000"/>
-                        </a:lnSpc>
-                        <a:spcBef>
-                          <a:spcPts val="0"/>
-                        </a:spcBef>
-                        <a:spcAft>
-                          <a:spcPts val="0"/>
-                        </a:spcAft>
-                      </a:pPr>
-                      <a:r>
-                        <a:rPr sz="1300" b="0">
-                          <a:solidFill>
-                            <a:srgbClr val="1F1F1F"/>
-                          </a:solidFill>
-                          <a:latin typeface="Calibri"/>
-                        </a:rPr>
-                        <a:t>confirmado; VNU geral</a:t>
-                      </a:r>
-                    </a:p>
-                    <a:p>
-                      <a:pPr algn="ctr">
-                        <a:lnSpc>
-                          <a:spcPct val="100000"/>
-                        </a:lnSpc>
-                        <a:spcBef>
-                          <a:spcPts val="0"/>
-                        </a:spcBef>
-                        <a:spcAft>
-                          <a:spcPts val="0"/>
-                        </a:spcAft>
-                      </a:pPr>
-                      <a:r>
-                        <a:rPr sz="1300" b="0">
-                          <a:solidFill>
-                            <a:srgbClr val="1F1F1F"/>
-                          </a:solidFill>
-                          <a:latin typeface="Calibri"/>
-                        </a:rPr>
-                        <a:t>R$ 1.000,00.</a:t>
+                        <a:t>Sênior, subordinadas</a:t>
+                      </a:r>
+                    </a:p>
+                    <a:p>
+                      <a:pPr algn="ctr">
+                        <a:lnSpc>
+                          <a:spcPct val="100000"/>
+                        </a:lnSpc>
+                        <a:spcBef>
+                          <a:spcPts val="0"/>
+                        </a:spcBef>
+                        <a:spcAft>
+                          <a:spcPts val="0"/>
+                        </a:spcAft>
+                      </a:pPr>
+                      <a:r>
+                        <a:rPr sz="1300" b="0">
+                          <a:solidFill>
+                            <a:srgbClr val="1F1F1F"/>
+                          </a:solidFill>
+                          <a:latin typeface="Calibri"/>
+                        </a:rPr>
+                        <a:t>mezanino e júnior</a:t>
                       </a:r>
                     </a:p>
                   </a:txBody>
@@ -23502,51 +21664,51 @@
                           </a:solidFill>
                           <a:latin typeface="Calibri"/>
                         </a:rPr>
-                        <a:t>4ª sênior até R$ 119,7</a:t>
-                      </a:r>
-                    </a:p>
-                    <a:p>
-                      <a:pPr algn="ctr">
-                        <a:lnSpc>
-                          <a:spcPct val="100000"/>
-                        </a:lnSpc>
-                        <a:spcBef>
-                          <a:spcPts val="0"/>
-                        </a:spcBef>
-                        <a:spcAft>
-                          <a:spcPts val="0"/>
-                        </a:spcAft>
-                      </a:pPr>
-                      <a:r>
-                        <a:rPr sz="1300" b="0">
-                          <a:solidFill>
-                            <a:srgbClr val="1F1F1F"/>
-                          </a:solidFill>
-                          <a:latin typeface="Calibri"/>
-                        </a:rPr>
-                        <a:t>mi; 3ª mezanino até R$</a:t>
-                      </a:r>
-                    </a:p>
-                    <a:p>
-                      <a:pPr algn="ctr">
-                        <a:lnSpc>
-                          <a:spcPct val="100000"/>
-                        </a:lnSpc>
-                        <a:spcBef>
-                          <a:spcPts val="0"/>
-                        </a:spcBef>
-                        <a:spcAft>
-                          <a:spcPts val="0"/>
-                        </a:spcAft>
-                      </a:pPr>
-                      <a:r>
-                        <a:rPr sz="1300" b="0">
-                          <a:solidFill>
-                            <a:srgbClr val="1F1F1F"/>
-                          </a:solidFill>
-                          <a:latin typeface="Calibri"/>
-                        </a:rPr>
-                        <a:t>5,32 mi; VNU R$ 1 mil.</a:t>
+                        <a:t>4ª sênior e 3ª mezanino</a:t>
+                      </a:r>
+                    </a:p>
+                    <a:p>
+                      <a:pPr algn="ctr">
+                        <a:lnSpc>
+                          <a:spcPct val="100000"/>
+                        </a:lnSpc>
+                        <a:spcBef>
+                          <a:spcPts val="0"/>
+                        </a:spcBef>
+                        <a:spcAft>
+                          <a:spcPts val="0"/>
+                        </a:spcAft>
+                      </a:pPr>
+                      <a:r>
+                        <a:rPr sz="1300" b="0">
+                          <a:solidFill>
+                            <a:srgbClr val="1F1F1F"/>
+                          </a:solidFill>
+                          <a:latin typeface="Calibri"/>
+                        </a:rPr>
+                        <a:t>com apêndices</a:t>
+                      </a:r>
+                    </a:p>
+                    <a:p>
+                      <a:pPr algn="ctr">
+                        <a:lnSpc>
+                          <a:spcPct val="100000"/>
+                        </a:lnSpc>
+                        <a:spcBef>
+                          <a:spcPts val="0"/>
+                        </a:spcBef>
+                        <a:spcAft>
+                          <a:spcPts val="0"/>
+                        </a:spcAft>
+                      </a:pPr>
+                      <a:r>
+                        <a:rPr sz="1300" b="0">
+                          <a:solidFill>
+                            <a:srgbClr val="1F1F1F"/>
+                          </a:solidFill>
+                          <a:latin typeface="Calibri"/>
+                        </a:rPr>
+                        <a:t>preenchidos</a:t>
                       </a:r>
                     </a:p>
                   </a:txBody>
@@ -23569,7 +21731,569 @@
                   </a:tcPr>
                 </a:tc>
               </a:tr>
-              <a:tr h="845819">
+              <a:tr h="658368">
+                <a:tc>
+                  <a:txBody>
+                    <a:bodyPr wrap="square">
+                      <a:noAutofit/>
+                    </a:bodyPr>
+                    <a:lstStyle/>
+                    <a:p>
+                      <a:pPr algn="l">
+                        <a:lnSpc>
+                          <a:spcPct val="100000"/>
+                        </a:lnSpc>
+                        <a:spcBef>
+                          <a:spcPts val="0"/>
+                        </a:spcBef>
+                        <a:spcAft>
+                          <a:spcPts val="0"/>
+                        </a:spcAft>
+                      </a:pPr>
+                      <a:r>
+                        <a:rPr sz="1300" b="1">
+                          <a:solidFill>
+                            <a:srgbClr val="1F1F1F"/>
+                          </a:solidFill>
+                          <a:latin typeface="Calibri"/>
+                        </a:rPr>
+                        <a:t>Remuneração</a:t>
+                      </a:r>
+                    </a:p>
+                  </a:txBody>
+                  <a:tcPr marL="91440" marR="91440" marT="41148" marB="41148" anchor="ctr">
+                    <a:solidFill>
+                      <a:srgbClr val="FFFFFF"/>
+                    </a:solidFill>
+                    <a:lnL>
+                      <a:noFill/>
+                    </a:lnL>
+                    <a:lnR>
+                      <a:noFill/>
+                    </a:lnR>
+                    <a:lnT>
+                      <a:noFill/>
+                    </a:lnT>
+                    <a:lnB>
+                      <a:noFill/>
+                    </a:lnB>
+                  </a:tcPr>
+                </a:tc>
+                <a:tc>
+                  <a:txBody>
+                    <a:bodyPr wrap="square">
+                      <a:noAutofit/>
+                    </a:bodyPr>
+                    <a:lstStyle/>
+                    <a:p>
+                      <a:pPr algn="ctr">
+                        <a:lnSpc>
+                          <a:spcPct val="100000"/>
+                        </a:lnSpc>
+                        <a:spcBef>
+                          <a:spcPts val="0"/>
+                        </a:spcBef>
+                        <a:spcAft>
+                          <a:spcPts val="0"/>
+                        </a:spcAft>
+                      </a:pPr>
+                      <a:r>
+                        <a:rPr sz="1300" b="0">
+                          <a:solidFill>
+                            <a:srgbClr val="1F1F1F"/>
+                          </a:solidFill>
+                          <a:latin typeface="Calibri"/>
+                        </a:rPr>
+                        <a:t>-</a:t>
+                      </a:r>
+                    </a:p>
+                  </a:txBody>
+                  <a:tcPr marL="91440" marR="91440" marT="41148" marB="41148" anchor="ctr">
+                    <a:solidFill>
+                      <a:srgbClr val="FFFFFF"/>
+                    </a:solidFill>
+                    <a:lnL>
+                      <a:noFill/>
+                    </a:lnL>
+                    <a:lnR>
+                      <a:noFill/>
+                    </a:lnR>
+                    <a:lnT>
+                      <a:noFill/>
+                    </a:lnT>
+                    <a:lnB>
+                      <a:noFill/>
+                    </a:lnB>
+                  </a:tcPr>
+                </a:tc>
+                <a:tc>
+                  <a:txBody>
+                    <a:bodyPr wrap="square">
+                      <a:noAutofit/>
+                    </a:bodyPr>
+                    <a:lstStyle/>
+                    <a:p>
+                      <a:pPr algn="ctr">
+                        <a:lnSpc>
+                          <a:spcPct val="100000"/>
+                        </a:lnSpc>
+                        <a:spcBef>
+                          <a:spcPts val="0"/>
+                        </a:spcBef>
+                        <a:spcAft>
+                          <a:spcPts val="0"/>
+                        </a:spcAft>
+                      </a:pPr>
+                      <a:r>
+                        <a:rPr sz="1300" b="0">
+                          <a:solidFill>
+                            <a:srgbClr val="1F1F1F"/>
+                          </a:solidFill>
+                          <a:latin typeface="Calibri"/>
+                        </a:rPr>
+                        <a:t>-</a:t>
+                      </a:r>
+                    </a:p>
+                  </a:txBody>
+                  <a:tcPr marL="91440" marR="91440" marT="41148" marB="41148" anchor="ctr">
+                    <a:solidFill>
+                      <a:srgbClr val="FFFFFF"/>
+                    </a:solidFill>
+                    <a:lnL>
+                      <a:noFill/>
+                    </a:lnL>
+                    <a:lnR>
+                      <a:noFill/>
+                    </a:lnR>
+                    <a:lnT>
+                      <a:noFill/>
+                    </a:lnT>
+                    <a:lnB>
+                      <a:noFill/>
+                    </a:lnB>
+                  </a:tcPr>
+                </a:tc>
+                <a:tc>
+                  <a:txBody>
+                    <a:bodyPr wrap="square">
+                      <a:noAutofit/>
+                    </a:bodyPr>
+                    <a:lstStyle/>
+                    <a:p>
+                      <a:pPr algn="ctr">
+                        <a:lnSpc>
+                          <a:spcPct val="100000"/>
+                        </a:lnSpc>
+                        <a:spcBef>
+                          <a:spcPts val="0"/>
+                        </a:spcBef>
+                        <a:spcAft>
+                          <a:spcPts val="0"/>
+                        </a:spcAft>
+                      </a:pPr>
+                      <a:r>
+                        <a:rPr sz="1300" b="0">
+                          <a:solidFill>
+                            <a:srgbClr val="1F1F1F"/>
+                          </a:solidFill>
+                          <a:latin typeface="Calibri"/>
+                        </a:rPr>
+                        <a:t>-</a:t>
+                      </a:r>
+                    </a:p>
+                  </a:txBody>
+                  <a:tcPr marL="91440" marR="91440" marT="41148" marB="41148" anchor="ctr">
+                    <a:solidFill>
+                      <a:srgbClr val="FFFFFF"/>
+                    </a:solidFill>
+                    <a:lnL>
+                      <a:noFill/>
+                    </a:lnL>
+                    <a:lnR>
+                      <a:noFill/>
+                    </a:lnR>
+                    <a:lnT>
+                      <a:noFill/>
+                    </a:lnT>
+                    <a:lnB>
+                      <a:noFill/>
+                    </a:lnB>
+                  </a:tcPr>
+                </a:tc>
+                <a:tc>
+                  <a:txBody>
+                    <a:bodyPr wrap="square">
+                      <a:noAutofit/>
+                    </a:bodyPr>
+                    <a:lstStyle/>
+                    <a:p>
+                      <a:pPr algn="ctr">
+                        <a:lnSpc>
+                          <a:spcPct val="100000"/>
+                        </a:lnSpc>
+                        <a:spcBef>
+                          <a:spcPts val="0"/>
+                        </a:spcBef>
+                        <a:spcAft>
+                          <a:spcPts val="0"/>
+                        </a:spcAft>
+                      </a:pPr>
+                      <a:r>
+                        <a:rPr sz="1300" b="0">
+                          <a:solidFill>
+                            <a:srgbClr val="1F1F1F"/>
+                          </a:solidFill>
+                          <a:latin typeface="Calibri"/>
+                        </a:rPr>
+                        <a:t>4ª sênior DI + 1,50%</a:t>
+                      </a:r>
+                    </a:p>
+                    <a:p>
+                      <a:pPr algn="ctr">
+                        <a:lnSpc>
+                          <a:spcPct val="100000"/>
+                        </a:lnSpc>
+                        <a:spcBef>
+                          <a:spcPts val="0"/>
+                        </a:spcBef>
+                        <a:spcAft>
+                          <a:spcPts val="0"/>
+                        </a:spcAft>
+                      </a:pPr>
+                      <a:r>
+                        <a:rPr sz="1300" b="0">
+                          <a:solidFill>
+                            <a:srgbClr val="1F1F1F"/>
+                          </a:solidFill>
+                          <a:latin typeface="Calibri"/>
+                        </a:rPr>
+                        <a:t>a.a.; 3ª mezanino DI +</a:t>
+                      </a:r>
+                    </a:p>
+                    <a:p>
+                      <a:pPr algn="ctr">
+                        <a:lnSpc>
+                          <a:spcPct val="100000"/>
+                        </a:lnSpc>
+                        <a:spcBef>
+                          <a:spcPts val="0"/>
+                        </a:spcBef>
+                        <a:spcAft>
+                          <a:spcPts val="0"/>
+                        </a:spcAft>
+                      </a:pPr>
+                      <a:r>
+                        <a:rPr sz="1300" b="0">
+                          <a:solidFill>
+                            <a:srgbClr val="1F1F1F"/>
+                          </a:solidFill>
+                          <a:latin typeface="Calibri"/>
+                        </a:rPr>
+                        <a:t>2,70% a.a.</a:t>
+                      </a:r>
+                    </a:p>
+                  </a:txBody>
+                  <a:tcPr marL="91440" marR="91440" marT="41148" marB="41148" anchor="ctr">
+                    <a:solidFill>
+                      <a:srgbClr val="FFFFFF"/>
+                    </a:solidFill>
+                    <a:lnL>
+                      <a:noFill/>
+                    </a:lnL>
+                    <a:lnR>
+                      <a:noFill/>
+                    </a:lnR>
+                    <a:lnT>
+                      <a:noFill/>
+                    </a:lnT>
+                    <a:lnB>
+                      <a:noFill/>
+                    </a:lnB>
+                  </a:tcPr>
+                </a:tc>
+              </a:tr>
+              <a:tr h="658368">
+                <a:tc>
+                  <a:txBody>
+                    <a:bodyPr wrap="square">
+                      <a:noAutofit/>
+                    </a:bodyPr>
+                    <a:lstStyle/>
+                    <a:p>
+                      <a:pPr algn="l">
+                        <a:lnSpc>
+                          <a:spcPct val="100000"/>
+                        </a:lnSpc>
+                        <a:spcBef>
+                          <a:spcPts val="0"/>
+                        </a:spcBef>
+                        <a:spcAft>
+                          <a:spcPts val="0"/>
+                        </a:spcAft>
+                      </a:pPr>
+                      <a:r>
+                        <a:rPr sz="1300" b="1">
+                          <a:solidFill>
+                            <a:srgbClr val="1F1F1F"/>
+                          </a:solidFill>
+                          <a:latin typeface="Calibri"/>
+                        </a:rPr>
+                        <a:t>Volume/VNU</a:t>
+                      </a:r>
+                    </a:p>
+                  </a:txBody>
+                  <a:tcPr marL="91440" marR="91440" marT="41148" marB="41148" anchor="ctr">
+                    <a:solidFill>
+                      <a:srgbClr val="FFFFFF"/>
+                    </a:solidFill>
+                    <a:lnL>
+                      <a:noFill/>
+                    </a:lnL>
+                    <a:lnR>
+                      <a:noFill/>
+                    </a:lnR>
+                    <a:lnT>
+                      <a:noFill/>
+                    </a:lnT>
+                    <a:lnB>
+                      <a:noFill/>
+                    </a:lnB>
+                  </a:tcPr>
+                </a:tc>
+                <a:tc>
+                  <a:txBody>
+                    <a:bodyPr wrap="square">
+                      <a:noAutofit/>
+                    </a:bodyPr>
+                    <a:lstStyle/>
+                    <a:p>
+                      <a:pPr algn="ctr">
+                        <a:lnSpc>
+                          <a:spcPct val="100000"/>
+                        </a:lnSpc>
+                        <a:spcBef>
+                          <a:spcPts val="0"/>
+                        </a:spcBef>
+                        <a:spcAft>
+                          <a:spcPts val="0"/>
+                        </a:spcAft>
+                      </a:pPr>
+                      <a:r>
+                        <a:rPr sz="1300" b="0">
+                          <a:solidFill>
+                            <a:srgbClr val="1F1F1F"/>
+                          </a:solidFill>
+                          <a:latin typeface="Calibri"/>
+                        </a:rPr>
+                        <a:t>VNU geral R$ 1,00.</a:t>
+                      </a:r>
+                    </a:p>
+                  </a:txBody>
+                  <a:tcPr marL="91440" marR="91440" marT="41148" marB="41148" anchor="ctr">
+                    <a:solidFill>
+                      <a:srgbClr val="FFFFFF"/>
+                    </a:solidFill>
+                    <a:lnL>
+                      <a:noFill/>
+                    </a:lnL>
+                    <a:lnR>
+                      <a:noFill/>
+                    </a:lnR>
+                    <a:lnT>
+                      <a:noFill/>
+                    </a:lnT>
+                    <a:lnB>
+                      <a:noFill/>
+                    </a:lnB>
+                  </a:tcPr>
+                </a:tc>
+                <a:tc>
+                  <a:txBody>
+                    <a:bodyPr wrap="square">
+                      <a:noAutofit/>
+                    </a:bodyPr>
+                    <a:lstStyle/>
+                    <a:p>
+                      <a:pPr algn="ctr">
+                        <a:lnSpc>
+                          <a:spcPct val="100000"/>
+                        </a:lnSpc>
+                        <a:spcBef>
+                          <a:spcPts val="0"/>
+                        </a:spcBef>
+                        <a:spcAft>
+                          <a:spcPts val="0"/>
+                        </a:spcAft>
+                      </a:pPr>
+                      <a:r>
+                        <a:rPr sz="1300" b="0">
+                          <a:solidFill>
+                            <a:srgbClr val="1F1F1F"/>
+                          </a:solidFill>
+                          <a:latin typeface="Calibri"/>
+                        </a:rPr>
+                        <a:t>VNU geral R$ 1.000,00.</a:t>
+                      </a:r>
+                    </a:p>
+                  </a:txBody>
+                  <a:tcPr marL="91440" marR="91440" marT="41148" marB="41148" anchor="ctr">
+                    <a:solidFill>
+                      <a:srgbClr val="FFFFFF"/>
+                    </a:solidFill>
+                    <a:lnL>
+                      <a:noFill/>
+                    </a:lnL>
+                    <a:lnR>
+                      <a:noFill/>
+                    </a:lnR>
+                    <a:lnT>
+                      <a:noFill/>
+                    </a:lnT>
+                    <a:lnB>
+                      <a:noFill/>
+                    </a:lnB>
+                  </a:tcPr>
+                </a:tc>
+                <a:tc>
+                  <a:txBody>
+                    <a:bodyPr wrap="square">
+                      <a:noAutofit/>
+                    </a:bodyPr>
+                    <a:lstStyle/>
+                    <a:p>
+                      <a:pPr algn="ctr">
+                        <a:lnSpc>
+                          <a:spcPct val="100000"/>
+                        </a:lnSpc>
+                        <a:spcBef>
+                          <a:spcPts val="0"/>
+                        </a:spcBef>
+                        <a:spcAft>
+                          <a:spcPts val="0"/>
+                        </a:spcAft>
+                      </a:pPr>
+                      <a:r>
+                        <a:rPr sz="1300" b="0">
+                          <a:solidFill>
+                            <a:srgbClr val="1F1F1F"/>
+                          </a:solidFill>
+                          <a:latin typeface="Calibri"/>
+                        </a:rPr>
+                        <a:t>VNU geral R$ 1.000,00.</a:t>
+                      </a:r>
+                    </a:p>
+                  </a:txBody>
+                  <a:tcPr marL="91440" marR="91440" marT="41148" marB="41148" anchor="ctr">
+                    <a:solidFill>
+                      <a:srgbClr val="FFFFFF"/>
+                    </a:solidFill>
+                    <a:lnL>
+                      <a:noFill/>
+                    </a:lnL>
+                    <a:lnR>
+                      <a:noFill/>
+                    </a:lnR>
+                    <a:lnT>
+                      <a:noFill/>
+                    </a:lnT>
+                    <a:lnB>
+                      <a:noFill/>
+                    </a:lnB>
+                  </a:tcPr>
+                </a:tc>
+                <a:tc>
+                  <a:txBody>
+                    <a:bodyPr wrap="square">
+                      <a:noAutofit/>
+                    </a:bodyPr>
+                    <a:lstStyle/>
+                    <a:p>
+                      <a:pPr algn="ctr">
+                        <a:lnSpc>
+                          <a:spcPct val="100000"/>
+                        </a:lnSpc>
+                        <a:spcBef>
+                          <a:spcPts val="0"/>
+                        </a:spcBef>
+                        <a:spcAft>
+                          <a:spcPts val="0"/>
+                        </a:spcAft>
+                      </a:pPr>
+                      <a:r>
+                        <a:rPr sz="1300" b="0">
+                          <a:solidFill>
+                            <a:srgbClr val="1F1F1F"/>
+                          </a:solidFill>
+                          <a:latin typeface="Calibri"/>
+                        </a:rPr>
+                        <a:t>4ª sênior até R$ 119,7</a:t>
+                      </a:r>
+                    </a:p>
+                    <a:p>
+                      <a:pPr algn="ctr">
+                        <a:lnSpc>
+                          <a:spcPct val="100000"/>
+                        </a:lnSpc>
+                        <a:spcBef>
+                          <a:spcPts val="0"/>
+                        </a:spcBef>
+                        <a:spcAft>
+                          <a:spcPts val="0"/>
+                        </a:spcAft>
+                      </a:pPr>
+                      <a:r>
+                        <a:rPr sz="1300" b="0">
+                          <a:solidFill>
+                            <a:srgbClr val="1F1F1F"/>
+                          </a:solidFill>
+                          <a:latin typeface="Calibri"/>
+                        </a:rPr>
+                        <a:t>mi; 3ª mezanino até R$</a:t>
+                      </a:r>
+                    </a:p>
+                    <a:p>
+                      <a:pPr algn="ctr">
+                        <a:lnSpc>
+                          <a:spcPct val="100000"/>
+                        </a:lnSpc>
+                        <a:spcBef>
+                          <a:spcPts val="0"/>
+                        </a:spcBef>
+                        <a:spcAft>
+                          <a:spcPts val="0"/>
+                        </a:spcAft>
+                      </a:pPr>
+                      <a:r>
+                        <a:rPr sz="1300" b="0">
+                          <a:solidFill>
+                            <a:srgbClr val="1F1F1F"/>
+                          </a:solidFill>
+                          <a:latin typeface="Calibri"/>
+                        </a:rPr>
+                        <a:t>5,32 mi; VNU R$ 1 mil.</a:t>
+                      </a:r>
+                    </a:p>
+                  </a:txBody>
+                  <a:tcPr marL="91440" marR="91440" marT="41148" marB="41148" anchor="ctr">
+                    <a:solidFill>
+                      <a:srgbClr val="FFFFFF"/>
+                    </a:solidFill>
+                    <a:lnL>
+                      <a:noFill/>
+                    </a:lnL>
+                    <a:lnR>
+                      <a:noFill/>
+                    </a:lnR>
+                    <a:lnT>
+                      <a:noFill/>
+                    </a:lnT>
+                    <a:lnB>
+                      <a:noFill/>
+                    </a:lnB>
+                  </a:tcPr>
+                </a:tc>
+              </a:tr>
+              <a:tr h="283464">
                 <a:tc>
                   <a:txBody>
                     <a:bodyPr wrap="square">
@@ -23644,73 +22368,7 @@
                           </a:solidFill>
                           <a:latin typeface="Calibri"/>
                         </a:rPr>
-                        <a:t>Início, encerramento e</a:t>
-                      </a:r>
-                    </a:p>
-                    <a:p>
-                      <a:pPr algn="ctr">
-                        <a:lnSpc>
-                          <a:spcPct val="100000"/>
-                        </a:lnSpc>
-                        <a:spcBef>
-                          <a:spcPts val="0"/>
-                        </a:spcBef>
-                        <a:spcAft>
-                          <a:spcPts val="0"/>
-                        </a:spcAft>
-                      </a:pPr>
-                      <a:r>
-                        <a:rPr sz="1300" b="0">
-                          <a:solidFill>
-                            <a:srgbClr val="1F1F1F"/>
-                          </a:solidFill>
-                          <a:latin typeface="Calibri"/>
-                        </a:rPr>
-                        <a:t>distribuição efetiva</a:t>
-                      </a:r>
-                    </a:p>
-                    <a:p>
-                      <a:pPr algn="ctr">
-                        <a:lnSpc>
-                          <a:spcPct val="100000"/>
-                        </a:lnSpc>
-                        <a:spcBef>
-                          <a:spcPts val="0"/>
-                        </a:spcBef>
-                        <a:spcAft>
-                          <a:spcPts val="0"/>
-                        </a:spcAft>
-                      </a:pPr>
-                      <a:r>
-                        <a:rPr sz="1300" b="0">
-                          <a:solidFill>
-                            <a:srgbClr val="1F1F1F"/>
-                          </a:solidFill>
-                          <a:latin typeface="Calibri"/>
-                        </a:rPr>
-                        <a:t>não confirmados por</a:t>
-                      </a:r>
-                    </a:p>
-                    <a:p>
-                      <a:pPr algn="ctr">
-                        <a:lnSpc>
-                          <a:spcPct val="100000"/>
-                        </a:lnSpc>
-                        <a:spcBef>
-                          <a:spcPts val="0"/>
-                        </a:spcBef>
-                        <a:spcAft>
-                          <a:spcPts val="0"/>
-                        </a:spcAft>
-                      </a:pPr>
-                      <a:r>
-                        <a:rPr sz="1300" b="0">
-                          <a:solidFill>
-                            <a:srgbClr val="1F1F1F"/>
-                          </a:solidFill>
-                          <a:latin typeface="Calibri"/>
-                        </a:rPr>
-                        <a:t>anúncios nesta revisão.</a:t>
+                        <a:t>-</a:t>
                       </a:r>
                     </a:p>
                   </a:txBody>
@@ -23759,73 +22417,7 @@
                           </a:solidFill>
                           <a:latin typeface="Calibri"/>
                         </a:rPr>
-                        <a:t>Início, encerramento e</a:t>
-                      </a:r>
-                    </a:p>
-                    <a:p>
-                      <a:pPr algn="ctr">
-                        <a:lnSpc>
-                          <a:spcPct val="100000"/>
-                        </a:lnSpc>
-                        <a:spcBef>
-                          <a:spcPts val="0"/>
-                        </a:spcBef>
-                        <a:spcAft>
-                          <a:spcPts val="0"/>
-                        </a:spcAft>
-                      </a:pPr>
-                      <a:r>
-                        <a:rPr sz="1300" b="0">
-                          <a:solidFill>
-                            <a:srgbClr val="1F1F1F"/>
-                          </a:solidFill>
-                          <a:latin typeface="Calibri"/>
-                        </a:rPr>
-                        <a:t>distribuição efetiva</a:t>
-                      </a:r>
-                    </a:p>
-                    <a:p>
-                      <a:pPr algn="ctr">
-                        <a:lnSpc>
-                          <a:spcPct val="100000"/>
-                        </a:lnSpc>
-                        <a:spcBef>
-                          <a:spcPts val="0"/>
-                        </a:spcBef>
-                        <a:spcAft>
-                          <a:spcPts val="0"/>
-                        </a:spcAft>
-                      </a:pPr>
-                      <a:r>
-                        <a:rPr sz="1300" b="0">
-                          <a:solidFill>
-                            <a:srgbClr val="1F1F1F"/>
-                          </a:solidFill>
-                          <a:latin typeface="Calibri"/>
-                        </a:rPr>
-                        <a:t>não confirmados por</a:t>
-                      </a:r>
-                    </a:p>
-                    <a:p>
-                      <a:pPr algn="ctr">
-                        <a:lnSpc>
-                          <a:spcPct val="100000"/>
-                        </a:lnSpc>
-                        <a:spcBef>
-                          <a:spcPts val="0"/>
-                        </a:spcBef>
-                        <a:spcAft>
-                          <a:spcPts val="0"/>
-                        </a:spcAft>
-                      </a:pPr>
-                      <a:r>
-                        <a:rPr sz="1300" b="0">
-                          <a:solidFill>
-                            <a:srgbClr val="1F1F1F"/>
-                          </a:solidFill>
-                          <a:latin typeface="Calibri"/>
-                        </a:rPr>
-                        <a:t>anúncios nesta revisão.</a:t>
+                        <a:t>-</a:t>
                       </a:r>
                     </a:p>
                   </a:txBody>
@@ -23874,73 +22466,7 @@
                           </a:solidFill>
                           <a:latin typeface="Calibri"/>
                         </a:rPr>
-                        <a:t>Início, encerramento e</a:t>
-                      </a:r>
-                    </a:p>
-                    <a:p>
-                      <a:pPr algn="ctr">
-                        <a:lnSpc>
-                          <a:spcPct val="100000"/>
-                        </a:lnSpc>
-                        <a:spcBef>
-                          <a:spcPts val="0"/>
-                        </a:spcBef>
-                        <a:spcAft>
-                          <a:spcPts val="0"/>
-                        </a:spcAft>
-                      </a:pPr>
-                      <a:r>
-                        <a:rPr sz="1300" b="0">
-                          <a:solidFill>
-                            <a:srgbClr val="1F1F1F"/>
-                          </a:solidFill>
-                          <a:latin typeface="Calibri"/>
-                        </a:rPr>
-                        <a:t>distribuição efetiva</a:t>
-                      </a:r>
-                    </a:p>
-                    <a:p>
-                      <a:pPr algn="ctr">
-                        <a:lnSpc>
-                          <a:spcPct val="100000"/>
-                        </a:lnSpc>
-                        <a:spcBef>
-                          <a:spcPts val="0"/>
-                        </a:spcBef>
-                        <a:spcAft>
-                          <a:spcPts val="0"/>
-                        </a:spcAft>
-                      </a:pPr>
-                      <a:r>
-                        <a:rPr sz="1300" b="0">
-                          <a:solidFill>
-                            <a:srgbClr val="1F1F1F"/>
-                          </a:solidFill>
-                          <a:latin typeface="Calibri"/>
-                        </a:rPr>
-                        <a:t>não confirmados por</a:t>
-                      </a:r>
-                    </a:p>
-                    <a:p>
-                      <a:pPr algn="ctr">
-                        <a:lnSpc>
-                          <a:spcPct val="100000"/>
-                        </a:lnSpc>
-                        <a:spcBef>
-                          <a:spcPts val="0"/>
-                        </a:spcBef>
-                        <a:spcAft>
-                          <a:spcPts val="0"/>
-                        </a:spcAft>
-                      </a:pPr>
-                      <a:r>
-                        <a:rPr sz="1300" b="0">
-                          <a:solidFill>
-                            <a:srgbClr val="1F1F1F"/>
-                          </a:solidFill>
-                          <a:latin typeface="Calibri"/>
-                        </a:rPr>
-                        <a:t>anúncios nesta revisão.</a:t>
+                        <a:t>-</a:t>
                       </a:r>
                     </a:p>
                   </a:txBody>
@@ -23989,73 +22515,7 @@
                           </a:solidFill>
                           <a:latin typeface="Calibri"/>
                         </a:rPr>
-                        <a:t>Início, encerramento e</a:t>
-                      </a:r>
-                    </a:p>
-                    <a:p>
-                      <a:pPr algn="ctr">
-                        <a:lnSpc>
-                          <a:spcPct val="100000"/>
-                        </a:lnSpc>
-                        <a:spcBef>
-                          <a:spcPts val="0"/>
-                        </a:spcBef>
-                        <a:spcAft>
-                          <a:spcPts val="0"/>
-                        </a:spcAft>
-                      </a:pPr>
-                      <a:r>
-                        <a:rPr sz="1300" b="0">
-                          <a:solidFill>
-                            <a:srgbClr val="1F1F1F"/>
-                          </a:solidFill>
-                          <a:latin typeface="Calibri"/>
-                        </a:rPr>
-                        <a:t>distribuição efetiva</a:t>
-                      </a:r>
-                    </a:p>
-                    <a:p>
-                      <a:pPr algn="ctr">
-                        <a:lnSpc>
-                          <a:spcPct val="100000"/>
-                        </a:lnSpc>
-                        <a:spcBef>
-                          <a:spcPts val="0"/>
-                        </a:spcBef>
-                        <a:spcAft>
-                          <a:spcPts val="0"/>
-                        </a:spcAft>
-                      </a:pPr>
-                      <a:r>
-                        <a:rPr sz="1300" b="0">
-                          <a:solidFill>
-                            <a:srgbClr val="1F1F1F"/>
-                          </a:solidFill>
-                          <a:latin typeface="Calibri"/>
-                        </a:rPr>
-                        <a:t>não confirmados por</a:t>
-                      </a:r>
-                    </a:p>
-                    <a:p>
-                      <a:pPr algn="ctr">
-                        <a:lnSpc>
-                          <a:spcPct val="100000"/>
-                        </a:lnSpc>
-                        <a:spcBef>
-                          <a:spcPts val="0"/>
-                        </a:spcBef>
-                        <a:spcAft>
-                          <a:spcPts val="0"/>
-                        </a:spcAft>
-                      </a:pPr>
-                      <a:r>
-                        <a:rPr sz="1300" b="0">
-                          <a:solidFill>
-                            <a:srgbClr val="1F1F1F"/>
-                          </a:solidFill>
-                          <a:latin typeface="Calibri"/>
-                        </a:rPr>
-                        <a:t>anúncios nesta revisão.</a:t>
+                        <a:t>-</a:t>
                       </a:r>
                     </a:p>
                   </a:txBody>
@@ -24225,7 +22685,7 @@
         </p:nvGraphicFramePr>
         <p:xfrm>
           <a:off x="438912" y="932688"/>
-          <a:ext cx="11313868" cy="3493006"/>
+          <a:ext cx="11313868" cy="3305555"/>
         </p:xfrm>
         <a:graphic>
           <a:graphicData uri="http://schemas.openxmlformats.org/drawingml/2006/table">
@@ -24262,7 +22722,7 @@
                       <a:r>
                         <a:rPr sz="1300" b="1">
                           <a:solidFill>
-                            <a:srgbClr val="1F1F1F"/>
+                            <a:srgbClr val="FFFFFF"/>
                           </a:solidFill>
                           <a:latin typeface="Calibri"/>
                         </a:rPr>
@@ -24272,7 +22732,7 @@
                   </a:txBody>
                   <a:tcPr marL="91440" marR="91440" marT="41148" marB="41148" anchor="ctr">
                     <a:solidFill>
-                      <a:srgbClr val="EC7000"/>
+                      <a:srgbClr val="FF6200"/>
                     </a:solidFill>
                     <a:lnL>
                       <a:noFill/>
@@ -24311,7 +22771,7 @@
                       <a:r>
                         <a:rPr sz="1300" b="1">
                           <a:solidFill>
-                            <a:srgbClr val="1F1F1F"/>
+                            <a:srgbClr val="FFFFFF"/>
                           </a:solidFill>
                           <a:latin typeface="Calibri"/>
                         </a:rPr>
@@ -24321,7 +22781,7 @@
                   </a:txBody>
                   <a:tcPr marL="91440" marR="91440" marT="41148" marB="41148" anchor="ctr">
                     <a:solidFill>
-                      <a:srgbClr val="EC7000"/>
+                      <a:srgbClr val="FF6200"/>
                     </a:solidFill>
                     <a:lnL>
                       <a:noFill/>
@@ -24360,7 +22820,7 @@
                       <a:r>
                         <a:rPr sz="1300" b="1">
                           <a:solidFill>
-                            <a:srgbClr val="1F1F1F"/>
+                            <a:srgbClr val="FFFFFF"/>
                           </a:solidFill>
                           <a:latin typeface="Calibri"/>
                         </a:rPr>
@@ -24370,7 +22830,7 @@
                   </a:txBody>
                   <a:tcPr marL="91440" marR="91440" marT="41148" marB="41148" anchor="ctr">
                     <a:solidFill>
-                      <a:srgbClr val="EC7000"/>
+                      <a:srgbClr val="FF6200"/>
                     </a:solidFill>
                     <a:lnL>
                       <a:noFill/>
@@ -24409,7 +22869,7 @@
                       <a:r>
                         <a:rPr sz="1300" b="1">
                           <a:solidFill>
-                            <a:srgbClr val="1F1F1F"/>
+                            <a:srgbClr val="FFFFFF"/>
                           </a:solidFill>
                           <a:latin typeface="Calibri"/>
                         </a:rPr>
@@ -24419,7 +22879,7 @@
                   </a:txBody>
                   <a:tcPr marL="91440" marR="91440" marT="41148" marB="41148" anchor="ctr">
                     <a:solidFill>
-                      <a:srgbClr val="EC7000"/>
+                      <a:srgbClr val="FF6200"/>
                     </a:solidFill>
                     <a:lnL>
                       <a:noFill/>
@@ -24458,7 +22918,7 @@
                       <a:r>
                         <a:rPr sz="1300" b="1">
                           <a:solidFill>
-                            <a:srgbClr val="1F1F1F"/>
+                            <a:srgbClr val="FFFFFF"/>
                           </a:solidFill>
                           <a:latin typeface="Calibri"/>
                         </a:rPr>
@@ -24468,7 +22928,7 @@
                   </a:txBody>
                   <a:tcPr marL="91440" marR="91440" marT="41148" marB="41148" anchor="ctr">
                     <a:solidFill>
-                      <a:srgbClr val="EC7000"/>
+                      <a:srgbClr val="FF6200"/>
                     </a:solidFill>
                     <a:lnL>
                       <a:noFill/>
@@ -24487,7 +22947,7 @@
                   </a:tcPr>
                 </a:tc>
               </a:tr>
-              <a:tr h="845819">
+              <a:tr h="658368">
                 <a:tc>
                   <a:txBody>
                     <a:bodyPr wrap="square">
@@ -24560,73 +23020,7 @@
                           </a:solidFill>
                           <a:latin typeface="Calibri"/>
                         </a:rPr>
-                        <a:t>Prazo remetido ao</a:t>
-                      </a:r>
-                    </a:p>
-                    <a:p>
-                      <a:pPr algn="ctr">
-                        <a:lnSpc>
-                          <a:spcPct val="100000"/>
-                        </a:lnSpc>
-                        <a:spcBef>
-                          <a:spcPts val="0"/>
-                        </a:spcBef>
-                        <a:spcAft>
-                          <a:spcPts val="0"/>
-                        </a:spcAft>
-                      </a:pPr>
-                      <a:r>
-                        <a:rPr sz="1300" b="0">
-                          <a:solidFill>
-                            <a:srgbClr val="1F1F1F"/>
-                          </a:solidFill>
-                          <a:latin typeface="Calibri"/>
-                        </a:rPr>
-                        <a:t>apêndice/suplemento;</a:t>
-                      </a:r>
-                    </a:p>
-                    <a:p>
-                      <a:pPr algn="ctr">
-                        <a:lnSpc>
-                          <a:spcPct val="100000"/>
-                        </a:lnSpc>
-                        <a:spcBef>
-                          <a:spcPts val="0"/>
-                        </a:spcBef>
-                        <a:spcAft>
-                          <a:spcPts val="0"/>
-                        </a:spcAft>
-                      </a:pPr>
-                      <a:r>
-                        <a:rPr sz="1300" b="0">
-                          <a:solidFill>
-                            <a:srgbClr val="1F1F1F"/>
-                          </a:solidFill>
-                          <a:latin typeface="Calibri"/>
-                        </a:rPr>
-                        <a:t>carência real por série</a:t>
-                      </a:r>
-                    </a:p>
-                    <a:p>
-                      <a:pPr algn="ctr">
-                        <a:lnSpc>
-                          <a:spcPct val="100000"/>
-                        </a:lnSpc>
-                        <a:spcBef>
-                          <a:spcPts val="0"/>
-                        </a:spcBef>
-                        <a:spcAft>
-                          <a:spcPts val="0"/>
-                        </a:spcAft>
-                      </a:pPr>
-                      <a:r>
-                        <a:rPr sz="1300" b="0">
-                          <a:solidFill>
-                            <a:srgbClr val="1F1F1F"/>
-                          </a:solidFill>
-                          <a:latin typeface="Calibri"/>
-                        </a:rPr>
-                        <a:t>não confirmada.</a:t>
+                        <a:t>-</a:t>
                       </a:r>
                     </a:p>
                   </a:txBody>
@@ -24673,73 +23067,7 @@
                           </a:solidFill>
                           <a:latin typeface="Calibri"/>
                         </a:rPr>
-                        <a:t>Prazo remetido ao</a:t>
-                      </a:r>
-                    </a:p>
-                    <a:p>
-                      <a:pPr algn="ctr">
-                        <a:lnSpc>
-                          <a:spcPct val="100000"/>
-                        </a:lnSpc>
-                        <a:spcBef>
-                          <a:spcPts val="0"/>
-                        </a:spcBef>
-                        <a:spcAft>
-                          <a:spcPts val="0"/>
-                        </a:spcAft>
-                      </a:pPr>
-                      <a:r>
-                        <a:rPr sz="1300" b="0">
-                          <a:solidFill>
-                            <a:srgbClr val="1F1F1F"/>
-                          </a:solidFill>
-                          <a:latin typeface="Calibri"/>
-                        </a:rPr>
-                        <a:t>apêndice/suplemento;</a:t>
-                      </a:r>
-                    </a:p>
-                    <a:p>
-                      <a:pPr algn="ctr">
-                        <a:lnSpc>
-                          <a:spcPct val="100000"/>
-                        </a:lnSpc>
-                        <a:spcBef>
-                          <a:spcPts val="0"/>
-                        </a:spcBef>
-                        <a:spcAft>
-                          <a:spcPts val="0"/>
-                        </a:spcAft>
-                      </a:pPr>
-                      <a:r>
-                        <a:rPr sz="1300" b="0">
-                          <a:solidFill>
-                            <a:srgbClr val="1F1F1F"/>
-                          </a:solidFill>
-                          <a:latin typeface="Calibri"/>
-                        </a:rPr>
-                        <a:t>carência real por série</a:t>
-                      </a:r>
-                    </a:p>
-                    <a:p>
-                      <a:pPr algn="ctr">
-                        <a:lnSpc>
-                          <a:spcPct val="100000"/>
-                        </a:lnSpc>
-                        <a:spcBef>
-                          <a:spcPts val="0"/>
-                        </a:spcBef>
-                        <a:spcAft>
-                          <a:spcPts val="0"/>
-                        </a:spcAft>
-                      </a:pPr>
-                      <a:r>
-                        <a:rPr sz="1300" b="0">
-                          <a:solidFill>
-                            <a:srgbClr val="1F1F1F"/>
-                          </a:solidFill>
-                          <a:latin typeface="Calibri"/>
-                        </a:rPr>
-                        <a:t>não confirmada.</a:t>
+                        <a:t>-</a:t>
                       </a:r>
                     </a:p>
                   </a:txBody>
@@ -24786,73 +23114,7 @@
                           </a:solidFill>
                           <a:latin typeface="Calibri"/>
                         </a:rPr>
-                        <a:t>Prazo remetido ao</a:t>
-                      </a:r>
-                    </a:p>
-                    <a:p>
-                      <a:pPr algn="ctr">
-                        <a:lnSpc>
-                          <a:spcPct val="100000"/>
-                        </a:lnSpc>
-                        <a:spcBef>
-                          <a:spcPts val="0"/>
-                        </a:spcBef>
-                        <a:spcAft>
-                          <a:spcPts val="0"/>
-                        </a:spcAft>
-                      </a:pPr>
-                      <a:r>
-                        <a:rPr sz="1300" b="0">
-                          <a:solidFill>
-                            <a:srgbClr val="1F1F1F"/>
-                          </a:solidFill>
-                          <a:latin typeface="Calibri"/>
-                        </a:rPr>
-                        <a:t>apêndice/suplemento;</a:t>
-                      </a:r>
-                    </a:p>
-                    <a:p>
-                      <a:pPr algn="ctr">
-                        <a:lnSpc>
-                          <a:spcPct val="100000"/>
-                        </a:lnSpc>
-                        <a:spcBef>
-                          <a:spcPts val="0"/>
-                        </a:spcBef>
-                        <a:spcAft>
-                          <a:spcPts val="0"/>
-                        </a:spcAft>
-                      </a:pPr>
-                      <a:r>
-                        <a:rPr sz="1300" b="0">
-                          <a:solidFill>
-                            <a:srgbClr val="1F1F1F"/>
-                          </a:solidFill>
-                          <a:latin typeface="Calibri"/>
-                        </a:rPr>
-                        <a:t>carência real por série</a:t>
-                      </a:r>
-                    </a:p>
-                    <a:p>
-                      <a:pPr algn="ctr">
-                        <a:lnSpc>
-                          <a:spcPct val="100000"/>
-                        </a:lnSpc>
-                        <a:spcBef>
-                          <a:spcPts val="0"/>
-                        </a:spcBef>
-                        <a:spcAft>
-                          <a:spcPts val="0"/>
-                        </a:spcAft>
-                      </a:pPr>
-                      <a:r>
-                        <a:rPr sz="1300" b="0">
-                          <a:solidFill>
-                            <a:srgbClr val="1F1F1F"/>
-                          </a:solidFill>
-                          <a:latin typeface="Calibri"/>
-                        </a:rPr>
-                        <a:t>não confirmada.</a:t>
+                        <a:t>-</a:t>
                       </a:r>
                     </a:p>
                   </a:txBody>
@@ -25105,51 +23367,7 @@
                           </a:solidFill>
                           <a:latin typeface="Calibri"/>
                         </a:rPr>
-                        <a:t>rata/sequencial;</a:t>
-                      </a:r>
-                    </a:p>
-                    <a:p>
-                      <a:pPr algn="ctr">
-                        <a:lnSpc>
-                          <a:spcPct val="100000"/>
-                        </a:lnSpc>
-                        <a:spcBef>
-                          <a:spcPts val="0"/>
-                        </a:spcBef>
-                        <a:spcAft>
-                          <a:spcPts val="0"/>
-                        </a:spcAft>
-                      </a:pPr>
-                      <a:r>
-                        <a:rPr sz="1300" b="0">
-                          <a:solidFill>
-                            <a:srgbClr val="1F1F1F"/>
-                          </a:solidFill>
-                          <a:latin typeface="Calibri"/>
-                        </a:rPr>
-                        <a:t>cronograma fechado não</a:t>
-                      </a:r>
-                    </a:p>
-                    <a:p>
-                      <a:pPr algn="ctr">
-                        <a:lnSpc>
-                          <a:spcPct val="100000"/>
-                        </a:lnSpc>
-                        <a:spcBef>
-                          <a:spcPts val="0"/>
-                        </a:spcBef>
-                        <a:spcAft>
-                          <a:spcPts val="0"/>
-                        </a:spcAft>
-                      </a:pPr>
-                      <a:r>
-                        <a:rPr sz="1300" b="0">
-                          <a:solidFill>
-                            <a:srgbClr val="1F1F1F"/>
-                          </a:solidFill>
-                          <a:latin typeface="Calibri"/>
-                        </a:rPr>
-                        <a:t>identificado.</a:t>
+                        <a:t>rata/sequencial</a:t>
                       </a:r>
                     </a:p>
                   </a:txBody>
@@ -25262,51 +23480,7 @@
                           </a:solidFill>
                           <a:latin typeface="Calibri"/>
                         </a:rPr>
-                        <a:t>rata/sequencial;</a:t>
-                      </a:r>
-                    </a:p>
-                    <a:p>
-                      <a:pPr algn="ctr">
-                        <a:lnSpc>
-                          <a:spcPct val="100000"/>
-                        </a:lnSpc>
-                        <a:spcBef>
-                          <a:spcPts val="0"/>
-                        </a:spcBef>
-                        <a:spcAft>
-                          <a:spcPts val="0"/>
-                        </a:spcAft>
-                      </a:pPr>
-                      <a:r>
-                        <a:rPr sz="1300" b="0">
-                          <a:solidFill>
-                            <a:srgbClr val="1F1F1F"/>
-                          </a:solidFill>
-                          <a:latin typeface="Calibri"/>
-                        </a:rPr>
-                        <a:t>cronograma fechado não</a:t>
-                      </a:r>
-                    </a:p>
-                    <a:p>
-                      <a:pPr algn="ctr">
-                        <a:lnSpc>
-                          <a:spcPct val="100000"/>
-                        </a:lnSpc>
-                        <a:spcBef>
-                          <a:spcPts val="0"/>
-                        </a:spcBef>
-                        <a:spcAft>
-                          <a:spcPts val="0"/>
-                        </a:spcAft>
-                      </a:pPr>
-                      <a:r>
-                        <a:rPr sz="1300" b="0">
-                          <a:solidFill>
-                            <a:srgbClr val="1F1F1F"/>
-                          </a:solidFill>
-                          <a:latin typeface="Calibri"/>
-                        </a:rPr>
-                        <a:t>identificado.</a:t>
+                        <a:t>rata/sequencial</a:t>
                       </a:r>
                     </a:p>
                   </a:txBody>
@@ -25419,51 +23593,7 @@
                           </a:solidFill>
                           <a:latin typeface="Calibri"/>
                         </a:rPr>
-                        <a:t>rata/sequencial;</a:t>
-                      </a:r>
-                    </a:p>
-                    <a:p>
-                      <a:pPr algn="ctr">
-                        <a:lnSpc>
-                          <a:spcPct val="100000"/>
-                        </a:lnSpc>
-                        <a:spcBef>
-                          <a:spcPts val="0"/>
-                        </a:spcBef>
-                        <a:spcAft>
-                          <a:spcPts val="0"/>
-                        </a:spcAft>
-                      </a:pPr>
-                      <a:r>
-                        <a:rPr sz="1300" b="0">
-                          <a:solidFill>
-                            <a:srgbClr val="1F1F1F"/>
-                          </a:solidFill>
-                          <a:latin typeface="Calibri"/>
-                        </a:rPr>
-                        <a:t>cronograma fechado não</a:t>
-                      </a:r>
-                    </a:p>
-                    <a:p>
-                      <a:pPr algn="ctr">
-                        <a:lnSpc>
-                          <a:spcPct val="100000"/>
-                        </a:lnSpc>
-                        <a:spcBef>
-                          <a:spcPts val="0"/>
-                        </a:spcBef>
-                        <a:spcAft>
-                          <a:spcPts val="0"/>
-                        </a:spcAft>
-                      </a:pPr>
-                      <a:r>
-                        <a:rPr sz="1300" b="0">
-                          <a:solidFill>
-                            <a:srgbClr val="1F1F1F"/>
-                          </a:solidFill>
-                          <a:latin typeface="Calibri"/>
-                        </a:rPr>
-                        <a:t>identificado.</a:t>
+                        <a:t>rata/sequencial</a:t>
                       </a:r>
                     </a:p>
                   </a:txBody>
@@ -25718,73 +23848,7 @@
                           </a:solidFill>
                           <a:latin typeface="Calibri"/>
                         </a:rPr>
-                        <a:t>Vencimento por série no</a:t>
-                      </a:r>
-                    </a:p>
-                    <a:p>
-                      <a:pPr algn="ctr">
-                        <a:lnSpc>
-                          <a:spcPct val="100000"/>
-                        </a:lnSpc>
-                        <a:spcBef>
-                          <a:spcPts val="0"/>
-                        </a:spcBef>
-                        <a:spcAft>
-                          <a:spcPts val="0"/>
-                        </a:spcAft>
-                      </a:pPr>
-                      <a:r>
-                        <a:rPr sz="1300" b="0">
-                          <a:solidFill>
-                            <a:srgbClr val="1F1F1F"/>
-                          </a:solidFill>
-                          <a:latin typeface="Calibri"/>
-                        </a:rPr>
-                        <a:t>apêndice; primeira</a:t>
-                      </a:r>
-                    </a:p>
-                    <a:p>
-                      <a:pPr algn="ctr">
-                        <a:lnSpc>
-                          <a:spcPct val="100000"/>
-                        </a:lnSpc>
-                        <a:spcBef>
-                          <a:spcPts val="0"/>
-                        </a:spcBef>
-                        <a:spcAft>
-                          <a:spcPts val="0"/>
-                        </a:spcAft>
-                      </a:pPr>
-                      <a:r>
-                        <a:rPr sz="1300" b="0">
-                          <a:solidFill>
-                            <a:srgbClr val="1F1F1F"/>
-                          </a:solidFill>
-                          <a:latin typeface="Calibri"/>
-                        </a:rPr>
-                        <a:t>integralização não</a:t>
-                      </a:r>
-                    </a:p>
-                    <a:p>
-                      <a:pPr algn="ctr">
-                        <a:lnSpc>
-                          <a:spcPct val="100000"/>
-                        </a:lnSpc>
-                        <a:spcBef>
-                          <a:spcPts val="0"/>
-                        </a:spcBef>
-                        <a:spcAft>
-                          <a:spcPts val="0"/>
-                        </a:spcAft>
-                      </a:pPr>
-                      <a:r>
-                        <a:rPr sz="1300" b="0">
-                          <a:solidFill>
-                            <a:srgbClr val="1F1F1F"/>
-                          </a:solidFill>
-                          <a:latin typeface="Calibri"/>
-                        </a:rPr>
-                        <a:t>confirmada.</a:t>
+                        <a:t>-</a:t>
                       </a:r>
                     </a:p>
                   </a:txBody>
@@ -25833,73 +23897,7 @@
                           </a:solidFill>
                           <a:latin typeface="Calibri"/>
                         </a:rPr>
-                        <a:t>Vencimento por série no</a:t>
-                      </a:r>
-                    </a:p>
-                    <a:p>
-                      <a:pPr algn="ctr">
-                        <a:lnSpc>
-                          <a:spcPct val="100000"/>
-                        </a:lnSpc>
-                        <a:spcBef>
-                          <a:spcPts val="0"/>
-                        </a:spcBef>
-                        <a:spcAft>
-                          <a:spcPts val="0"/>
-                        </a:spcAft>
-                      </a:pPr>
-                      <a:r>
-                        <a:rPr sz="1300" b="0">
-                          <a:solidFill>
-                            <a:srgbClr val="1F1F1F"/>
-                          </a:solidFill>
-                          <a:latin typeface="Calibri"/>
-                        </a:rPr>
-                        <a:t>apêndice; primeira</a:t>
-                      </a:r>
-                    </a:p>
-                    <a:p>
-                      <a:pPr algn="ctr">
-                        <a:lnSpc>
-                          <a:spcPct val="100000"/>
-                        </a:lnSpc>
-                        <a:spcBef>
-                          <a:spcPts val="0"/>
-                        </a:spcBef>
-                        <a:spcAft>
-                          <a:spcPts val="0"/>
-                        </a:spcAft>
-                      </a:pPr>
-                      <a:r>
-                        <a:rPr sz="1300" b="0">
-                          <a:solidFill>
-                            <a:srgbClr val="1F1F1F"/>
-                          </a:solidFill>
-                          <a:latin typeface="Calibri"/>
-                        </a:rPr>
-                        <a:t>integralização não</a:t>
-                      </a:r>
-                    </a:p>
-                    <a:p>
-                      <a:pPr algn="ctr">
-                        <a:lnSpc>
-                          <a:spcPct val="100000"/>
-                        </a:lnSpc>
-                        <a:spcBef>
-                          <a:spcPts val="0"/>
-                        </a:spcBef>
-                        <a:spcAft>
-                          <a:spcPts val="0"/>
-                        </a:spcAft>
-                      </a:pPr>
-                      <a:r>
-                        <a:rPr sz="1300" b="0">
-                          <a:solidFill>
-                            <a:srgbClr val="1F1F1F"/>
-                          </a:solidFill>
-                          <a:latin typeface="Calibri"/>
-                        </a:rPr>
-                        <a:t>confirmada.</a:t>
+                        <a:t>-</a:t>
                       </a:r>
                     </a:p>
                   </a:txBody>
@@ -25948,73 +23946,7 @@
                           </a:solidFill>
                           <a:latin typeface="Calibri"/>
                         </a:rPr>
-                        <a:t>Vencimento por série no</a:t>
-                      </a:r>
-                    </a:p>
-                    <a:p>
-                      <a:pPr algn="ctr">
-                        <a:lnSpc>
-                          <a:spcPct val="100000"/>
-                        </a:lnSpc>
-                        <a:spcBef>
-                          <a:spcPts val="0"/>
-                        </a:spcBef>
-                        <a:spcAft>
-                          <a:spcPts val="0"/>
-                        </a:spcAft>
-                      </a:pPr>
-                      <a:r>
-                        <a:rPr sz="1300" b="0">
-                          <a:solidFill>
-                            <a:srgbClr val="1F1F1F"/>
-                          </a:solidFill>
-                          <a:latin typeface="Calibri"/>
-                        </a:rPr>
-                        <a:t>apêndice; primeira</a:t>
-                      </a:r>
-                    </a:p>
-                    <a:p>
-                      <a:pPr algn="ctr">
-                        <a:lnSpc>
-                          <a:spcPct val="100000"/>
-                        </a:lnSpc>
-                        <a:spcBef>
-                          <a:spcPts val="0"/>
-                        </a:spcBef>
-                        <a:spcAft>
-                          <a:spcPts val="0"/>
-                        </a:spcAft>
-                      </a:pPr>
-                      <a:r>
-                        <a:rPr sz="1300" b="0">
-                          <a:solidFill>
-                            <a:srgbClr val="1F1F1F"/>
-                          </a:solidFill>
-                          <a:latin typeface="Calibri"/>
-                        </a:rPr>
-                        <a:t>integralização não</a:t>
-                      </a:r>
-                    </a:p>
-                    <a:p>
-                      <a:pPr algn="ctr">
-                        <a:lnSpc>
-                          <a:spcPct val="100000"/>
-                        </a:lnSpc>
-                        <a:spcBef>
-                          <a:spcPts val="0"/>
-                        </a:spcBef>
-                        <a:spcAft>
-                          <a:spcPts val="0"/>
-                        </a:spcAft>
-                      </a:pPr>
-                      <a:r>
-                        <a:rPr sz="1300" b="0">
-                          <a:solidFill>
-                            <a:srgbClr val="1F1F1F"/>
-                          </a:solidFill>
-                          <a:latin typeface="Calibri"/>
-                        </a:rPr>
-                        <a:t>confirmada.</a:t>
+                        <a:t>-</a:t>
                       </a:r>
                     </a:p>
                   </a:txBody>
@@ -26321,7 +24253,7 @@
         </p:nvGraphicFramePr>
         <p:xfrm>
           <a:off x="438912" y="932688"/>
-          <a:ext cx="11313868" cy="3305555"/>
+          <a:ext cx="11313868" cy="3118103"/>
         </p:xfrm>
         <a:graphic>
           <a:graphicData uri="http://schemas.openxmlformats.org/drawingml/2006/table">
@@ -26358,7 +24290,7 @@
                       <a:r>
                         <a:rPr sz="1300" b="1">
                           <a:solidFill>
-                            <a:srgbClr val="1F1F1F"/>
+                            <a:srgbClr val="FFFFFF"/>
                           </a:solidFill>
                           <a:latin typeface="Calibri"/>
                         </a:rPr>
@@ -26368,7 +24300,7 @@
                   </a:txBody>
                   <a:tcPr marL="91440" marR="91440" marT="41148" marB="41148" anchor="ctr">
                     <a:solidFill>
-                      <a:srgbClr val="EC7000"/>
+                      <a:srgbClr val="FF6200"/>
                     </a:solidFill>
                     <a:lnL>
                       <a:noFill/>
@@ -26407,7 +24339,7 @@
                       <a:r>
                         <a:rPr sz="1300" b="1">
                           <a:solidFill>
-                            <a:srgbClr val="1F1F1F"/>
+                            <a:srgbClr val="FFFFFF"/>
                           </a:solidFill>
                           <a:latin typeface="Calibri"/>
                         </a:rPr>
@@ -26417,7 +24349,7 @@
                   </a:txBody>
                   <a:tcPr marL="91440" marR="91440" marT="41148" marB="41148" anchor="ctr">
                     <a:solidFill>
-                      <a:srgbClr val="EC7000"/>
+                      <a:srgbClr val="FF6200"/>
                     </a:solidFill>
                     <a:lnL>
                       <a:noFill/>
@@ -26456,7 +24388,7 @@
                       <a:r>
                         <a:rPr sz="1300" b="1">
                           <a:solidFill>
-                            <a:srgbClr val="1F1F1F"/>
+                            <a:srgbClr val="FFFFFF"/>
                           </a:solidFill>
                           <a:latin typeface="Calibri"/>
                         </a:rPr>
@@ -26466,7 +24398,7 @@
                   </a:txBody>
                   <a:tcPr marL="91440" marR="91440" marT="41148" marB="41148" anchor="ctr">
                     <a:solidFill>
-                      <a:srgbClr val="EC7000"/>
+                      <a:srgbClr val="FF6200"/>
                     </a:solidFill>
                     <a:lnL>
                       <a:noFill/>
@@ -26505,7 +24437,7 @@
                       <a:r>
                         <a:rPr sz="1300" b="1">
                           <a:solidFill>
-                            <a:srgbClr val="1F1F1F"/>
+                            <a:srgbClr val="FFFFFF"/>
                           </a:solidFill>
                           <a:latin typeface="Calibri"/>
                         </a:rPr>
@@ -26515,7 +24447,7 @@
                   </a:txBody>
                   <a:tcPr marL="91440" marR="91440" marT="41148" marB="41148" anchor="ctr">
                     <a:solidFill>
-                      <a:srgbClr val="EC7000"/>
+                      <a:srgbClr val="FF6200"/>
                     </a:solidFill>
                     <a:lnL>
                       <a:noFill/>
@@ -26554,7 +24486,7 @@
                       <a:r>
                         <a:rPr sz="1300" b="1">
                           <a:solidFill>
-                            <a:srgbClr val="1F1F1F"/>
+                            <a:srgbClr val="FFFFFF"/>
                           </a:solidFill>
                           <a:latin typeface="Calibri"/>
                         </a:rPr>
@@ -26564,7 +24496,7 @@
                   </a:txBody>
                   <a:tcPr marL="91440" marR="91440" marT="41148" marB="41148" anchor="ctr">
                     <a:solidFill>
-                      <a:srgbClr val="EC7000"/>
+                      <a:srgbClr val="FF6200"/>
                     </a:solidFill>
                     <a:lnL>
                       <a:noFill/>
@@ -27201,51 +25133,7 @@
                           </a:solidFill>
                           <a:latin typeface="Calibri"/>
                         </a:rPr>
-                        <a:t>0,05% a.a./PL; mínimo</a:t>
-                      </a:r>
-                    </a:p>
-                    <a:p>
-                      <a:pPr algn="ctr">
-                        <a:lnSpc>
-                          <a:spcPct val="100000"/>
-                        </a:lnSpc>
-                        <a:spcBef>
-                          <a:spcPts val="0"/>
-                        </a:spcBef>
-                        <a:spcAft>
-                          <a:spcPts val="0"/>
-                        </a:spcAft>
-                      </a:pPr>
-                      <a:r>
-                        <a:rPr sz="1300" b="0">
-                          <a:solidFill>
-                            <a:srgbClr val="1F1F1F"/>
-                          </a:solidFill>
-                          <a:latin typeface="Calibri"/>
-                        </a:rPr>
-                        <a:t>mensal não identificado</a:t>
-                      </a:r>
-                    </a:p>
-                    <a:p>
-                      <a:pPr algn="ctr">
-                        <a:lnSpc>
-                          <a:spcPct val="100000"/>
-                        </a:lnSpc>
-                        <a:spcBef>
-                          <a:spcPts val="0"/>
-                        </a:spcBef>
-                        <a:spcAft>
-                          <a:spcPts val="0"/>
-                        </a:spcAft>
-                      </a:pPr>
-                      <a:r>
-                        <a:rPr sz="1300" b="0">
-                          <a:solidFill>
-                            <a:srgbClr val="1F1F1F"/>
-                          </a:solidFill>
-                          <a:latin typeface="Calibri"/>
-                        </a:rPr>
-                        <a:t>na cláusula.</a:t>
+                        <a:t>0,05% a.a./PL</a:t>
                       </a:r>
                     </a:p>
                   </a:txBody>
@@ -27292,51 +25180,7 @@
                           </a:solidFill>
                           <a:latin typeface="Calibri"/>
                         </a:rPr>
-                        <a:t>0,05% a.a./PL; mínimo</a:t>
-                      </a:r>
-                    </a:p>
-                    <a:p>
-                      <a:pPr algn="ctr">
-                        <a:lnSpc>
-                          <a:spcPct val="100000"/>
-                        </a:lnSpc>
-                        <a:spcBef>
-                          <a:spcPts val="0"/>
-                        </a:spcBef>
-                        <a:spcAft>
-                          <a:spcPts val="0"/>
-                        </a:spcAft>
-                      </a:pPr>
-                      <a:r>
-                        <a:rPr sz="1300" b="0">
-                          <a:solidFill>
-                            <a:srgbClr val="1F1F1F"/>
-                          </a:solidFill>
-                          <a:latin typeface="Calibri"/>
-                        </a:rPr>
-                        <a:t>mensal não</a:t>
-                      </a:r>
-                    </a:p>
-                    <a:p>
-                      <a:pPr algn="ctr">
-                        <a:lnSpc>
-                          <a:spcPct val="100000"/>
-                        </a:lnSpc>
-                        <a:spcBef>
-                          <a:spcPts val="0"/>
-                        </a:spcBef>
-                        <a:spcAft>
-                          <a:spcPts val="0"/>
-                        </a:spcAft>
-                      </a:pPr>
-                      <a:r>
-                        <a:rPr sz="1300" b="0">
-                          <a:solidFill>
-                            <a:srgbClr val="1F1F1F"/>
-                          </a:solidFill>
-                          <a:latin typeface="Calibri"/>
-                        </a:rPr>
-                        <a:t>identificado.</a:t>
+                        <a:t>0,05% a.a./PL</a:t>
                       </a:r>
                     </a:p>
                   </a:txBody>
@@ -27541,7 +25385,7 @@
                   </a:tcPr>
                 </a:tc>
               </a:tr>
-              <a:tr h="1033271">
+              <a:tr h="845819">
                 <a:tc>
                   <a:txBody>
                     <a:bodyPr wrap="square">
@@ -27660,51 +25504,7 @@
                           </a:solidFill>
                           <a:latin typeface="Calibri"/>
                         </a:rPr>
-                        <a:t>administração; tarifa</a:t>
-                      </a:r>
-                    </a:p>
-                    <a:p>
-                      <a:pPr algn="ctr">
-                        <a:lnSpc>
-                          <a:spcPct val="100000"/>
-                        </a:lnSpc>
-                        <a:spcBef>
-                          <a:spcPts val="0"/>
-                        </a:spcBef>
-                        <a:spcAft>
-                          <a:spcPts val="0"/>
-                        </a:spcAft>
-                      </a:pPr>
-                      <a:r>
-                        <a:rPr sz="1300" b="0">
-                          <a:solidFill>
-                            <a:srgbClr val="1F1F1F"/>
-                          </a:solidFill>
-                          <a:latin typeface="Calibri"/>
-                        </a:rPr>
-                        <a:t>separada não</a:t>
-                      </a:r>
-                    </a:p>
-                    <a:p>
-                      <a:pPr algn="ctr">
-                        <a:lnSpc>
-                          <a:spcPct val="100000"/>
-                        </a:lnSpc>
-                        <a:spcBef>
-                          <a:spcPts val="0"/>
-                        </a:spcBef>
-                        <a:spcAft>
-                          <a:spcPts val="0"/>
-                        </a:spcAft>
-                      </a:pPr>
-                      <a:r>
-                        <a:rPr sz="1300" b="0">
-                          <a:solidFill>
-                            <a:srgbClr val="1F1F1F"/>
-                          </a:solidFill>
-                          <a:latin typeface="Calibri"/>
-                        </a:rPr>
-                        <a:t>identificada.</a:t>
+                        <a:t>administração</a:t>
                       </a:r>
                     </a:p>
                   </a:txBody>
@@ -27797,29 +25597,7 @@
                           </a:solidFill>
                           <a:latin typeface="Calibri"/>
                         </a:rPr>
-                        <a:t>administração; tarifa</a:t>
-                      </a:r>
-                    </a:p>
-                    <a:p>
-                      <a:pPr algn="ctr">
-                        <a:lnSpc>
-                          <a:spcPct val="100000"/>
-                        </a:lnSpc>
-                        <a:spcBef>
-                          <a:spcPts val="0"/>
-                        </a:spcBef>
-                        <a:spcAft>
-                          <a:spcPts val="0"/>
-                        </a:spcAft>
-                      </a:pPr>
-                      <a:r>
-                        <a:rPr sz="1300" b="0">
-                          <a:solidFill>
-                            <a:srgbClr val="1F1F1F"/>
-                          </a:solidFill>
-                          <a:latin typeface="Calibri"/>
-                        </a:rPr>
-                        <a:t>isolada não confirmada.</a:t>
+                        <a:t>administração</a:t>
                       </a:r>
                     </a:p>
                   </a:txBody>
